--- a/training/slides/Module_08_Capstone.pptx
+++ b/training/slides/Module_08_Capstone.pptx
@@ -17,7 +17,6 @@
     <p:sldId id="265" r:id="rId16"/>
     <p:sldId id="266" r:id="rId17"/>
     <p:sldId id="267" r:id="rId18"/>
-    <p:sldId id="268" r:id="rId19"/>
   </p:sldIdLst>
   <p:sldSz cx="12191695" cy="6858000" type="screen4x3"/>
   <p:notesSz cx="6858000" cy="9144000"/>
@@ -3096,7 +3095,7 @@
     <p:bg>
       <p:bgPr>
         <a:solidFill>
-          <a:srgbClr val="1A1A2E"/>
+          <a:srgbClr val="1E1B4B"/>
         </a:solidFill>
         <a:effectLst/>
       </p:bgPr>
@@ -3117,13 +3116,13 @@
         <p:spPr>
           <a:xfrm>
             <a:off x="0" y="0"/>
-            <a:ext cx="137160" cy="6858000"/>
+            <a:ext cx="5943600" cy="6858000"/>
           </a:xfrm>
           <a:prstGeom prst="rect">
             <a:avLst/>
           </a:prstGeom>
           <a:solidFill>
-            <a:srgbClr val="007BFF"/>
+            <a:srgbClr val="1E1B4B"/>
           </a:solidFill>
           <a:ln>
             <a:noFill/>
@@ -3153,50 +3152,288 @@
       </p:sp>
       <p:sp>
         <p:nvSpPr>
-          <p:cNvPr id="3" name="TextBox 2"/>
+          <p:cNvPr id="3" name="Rectangle 2"/>
+          <p:cNvSpPr/>
+          <p:nvPr/>
+        </p:nvSpPr>
+        <p:spPr>
+          <a:xfrm>
+            <a:off x="5943600" y="0"/>
+            <a:ext cx="3200400" cy="6858000"/>
+          </a:xfrm>
+          <a:prstGeom prst="rect">
+            <a:avLst/>
+          </a:prstGeom>
+          <a:solidFill>
+            <a:srgbClr val="312E81"/>
+          </a:solidFill>
+          <a:ln>
+            <a:noFill/>
+          </a:ln>
+        </p:spPr>
+        <p:style>
+          <a:lnRef idx="1">
+            <a:schemeClr val="accent1"/>
+          </a:lnRef>
+          <a:fillRef idx="3">
+            <a:schemeClr val="accent1"/>
+          </a:fillRef>
+          <a:effectRef idx="2">
+            <a:schemeClr val="accent1"/>
+          </a:effectRef>
+          <a:fontRef idx="minor">
+            <a:schemeClr val="lt1"/>
+          </a:fontRef>
+        </p:style>
+        <p:txBody>
+          <a:bodyPr rtlCol="0" anchor="ctr"/>
+          <a:lstStyle/>
+          <a:p>
+            <a:pPr algn="ctr"/>
+          </a:p>
+        </p:txBody>
+      </p:sp>
+      <p:sp>
+        <p:nvSpPr>
+          <p:cNvPr id="4" name="Rectangle 3"/>
+          <p:cNvSpPr/>
+          <p:nvPr/>
+        </p:nvSpPr>
+        <p:spPr>
+          <a:xfrm>
+            <a:off x="9144000" y="0"/>
+            <a:ext cx="3047695" cy="6858000"/>
+          </a:xfrm>
+          <a:prstGeom prst="rect">
+            <a:avLst/>
+          </a:prstGeom>
+          <a:solidFill>
+            <a:srgbClr val="4338CA"/>
+          </a:solidFill>
+          <a:ln>
+            <a:noFill/>
+          </a:ln>
+        </p:spPr>
+        <p:style>
+          <a:lnRef idx="1">
+            <a:schemeClr val="accent1"/>
+          </a:lnRef>
+          <a:fillRef idx="3">
+            <a:schemeClr val="accent1"/>
+          </a:fillRef>
+          <a:effectRef idx="2">
+            <a:schemeClr val="accent1"/>
+          </a:effectRef>
+          <a:fontRef idx="minor">
+            <a:schemeClr val="lt1"/>
+          </a:fontRef>
+        </p:style>
+        <p:txBody>
+          <a:bodyPr rtlCol="0" anchor="ctr"/>
+          <a:lstStyle/>
+          <a:p>
+            <a:pPr algn="ctr"/>
+          </a:p>
+        </p:txBody>
+      </p:sp>
+      <p:sp>
+        <p:nvSpPr>
+          <p:cNvPr id="5" name="Rectangle 4"/>
+          <p:cNvSpPr/>
+          <p:nvPr/>
+        </p:nvSpPr>
+        <p:spPr>
+          <a:xfrm>
+            <a:off x="0" y="0"/>
+            <a:ext cx="73152" cy="6858000"/>
+          </a:xfrm>
+          <a:prstGeom prst="rect">
+            <a:avLst/>
+          </a:prstGeom>
+          <a:solidFill>
+            <a:srgbClr val="6366F1"/>
+          </a:solidFill>
+          <a:ln>
+            <a:noFill/>
+          </a:ln>
+        </p:spPr>
+        <p:style>
+          <a:lnRef idx="1">
+            <a:schemeClr val="accent1"/>
+          </a:lnRef>
+          <a:fillRef idx="3">
+            <a:schemeClr val="accent1"/>
+          </a:fillRef>
+          <a:effectRef idx="2">
+            <a:schemeClr val="accent1"/>
+          </a:effectRef>
+          <a:fontRef idx="minor">
+            <a:schemeClr val="lt1"/>
+          </a:fontRef>
+        </p:style>
+        <p:txBody>
+          <a:bodyPr rtlCol="0" anchor="ctr"/>
+          <a:lstStyle/>
+          <a:p>
+            <a:pPr algn="ctr"/>
+          </a:p>
+        </p:txBody>
+      </p:sp>
+      <p:sp>
+        <p:nvSpPr>
+          <p:cNvPr id="6" name="Oval 5"/>
+          <p:cNvSpPr/>
+          <p:nvPr/>
+        </p:nvSpPr>
+        <p:spPr>
+          <a:xfrm>
+            <a:off x="8229600" y="-914400"/>
+            <a:ext cx="4572000" cy="4572000"/>
+          </a:xfrm>
+          <a:prstGeom prst="ellipse">
+            <a:avLst/>
+          </a:prstGeom>
+          <a:solidFill>
+            <a:srgbClr val="6366F1">
+              <a:lumMod val="70000"/>
+              <a:lumOff val="30000"/>
+            </a:srgbClr>
+          </a:solidFill>
+          <a:ln>
+            <a:noFill/>
+          </a:ln>
+        </p:spPr>
+        <p:style>
+          <a:lnRef idx="1">
+            <a:schemeClr val="accent1"/>
+          </a:lnRef>
+          <a:fillRef idx="3">
+            <a:schemeClr val="accent1"/>
+          </a:fillRef>
+          <a:effectRef idx="2">
+            <a:schemeClr val="accent1"/>
+          </a:effectRef>
+          <a:fontRef idx="minor">
+            <a:schemeClr val="lt1"/>
+          </a:fontRef>
+        </p:style>
+        <p:txBody>
+          <a:bodyPr rtlCol="0" anchor="ctr"/>
+          <a:lstStyle/>
+          <a:p>
+            <a:pPr algn="ctr"/>
+          </a:p>
+        </p:txBody>
+      </p:sp>
+      <p:sp>
+        <p:nvSpPr>
+          <p:cNvPr id="7" name="Oval 6"/>
+          <p:cNvSpPr/>
+          <p:nvPr/>
+        </p:nvSpPr>
+        <p:spPr>
+          <a:xfrm>
+            <a:off x="-914400" y="3657600"/>
+            <a:ext cx="3657600" cy="3657600"/>
+          </a:xfrm>
+          <a:prstGeom prst="ellipse">
+            <a:avLst/>
+          </a:prstGeom>
+          <a:solidFill>
+            <a:srgbClr val="5046E5">
+              <a:lumMod val="60000"/>
+              <a:lumOff val="40000"/>
+            </a:srgbClr>
+          </a:solidFill>
+          <a:ln>
+            <a:noFill/>
+          </a:ln>
+        </p:spPr>
+        <p:style>
+          <a:lnRef idx="1">
+            <a:schemeClr val="accent1"/>
+          </a:lnRef>
+          <a:fillRef idx="3">
+            <a:schemeClr val="accent1"/>
+          </a:fillRef>
+          <a:effectRef idx="2">
+            <a:schemeClr val="accent1"/>
+          </a:effectRef>
+          <a:fontRef idx="minor">
+            <a:schemeClr val="lt1"/>
+          </a:fontRef>
+        </p:style>
+        <p:txBody>
+          <a:bodyPr rtlCol="0" anchor="ctr"/>
+          <a:lstStyle/>
+          <a:p>
+            <a:pPr algn="ctr"/>
+          </a:p>
+        </p:txBody>
+      </p:sp>
+      <p:sp>
+        <p:nvSpPr>
+          <p:cNvPr id="8" name="Rounded Rectangle 7"/>
+          <p:cNvSpPr/>
+          <p:nvPr/>
+        </p:nvSpPr>
+        <p:spPr>
+          <a:xfrm>
+            <a:off x="914400" y="1371600"/>
+            <a:ext cx="2377440" cy="438912"/>
+          </a:xfrm>
+          <a:prstGeom prst="roundRect">
+            <a:avLst/>
+          </a:prstGeom>
+          <a:solidFill>
+            <a:srgbClr val="312E81"/>
+          </a:solidFill>
+          <a:ln>
+            <a:noFill/>
+          </a:ln>
+        </p:spPr>
+        <p:style>
+          <a:lnRef idx="1">
+            <a:schemeClr val="accent1"/>
+          </a:lnRef>
+          <a:fillRef idx="3">
+            <a:schemeClr val="accent1"/>
+          </a:fillRef>
+          <a:effectRef idx="2">
+            <a:schemeClr val="accent1"/>
+          </a:effectRef>
+          <a:fontRef idx="minor">
+            <a:schemeClr val="lt1"/>
+          </a:fontRef>
+        </p:style>
+        <p:txBody>
+          <a:bodyPr rtlCol="0" anchor="ctr" lIns="137160"/>
+          <a:lstStyle/>
+          <a:p>
+            <a:pPr algn="l">
+              <a:defRPr sz="1400" b="1">
+                <a:solidFill>
+                  <a:srgbClr val="C7D2FE"/>
+                </a:solidFill>
+                <a:latin typeface="Consolas"/>
+              </a:defRPr>
+            </a:pPr>
+            <a:r>
+              <a:t>MODULE 8</a:t>
+            </a:r>
+          </a:p>
+        </p:txBody>
+      </p:sp>
+      <p:sp>
+        <p:nvSpPr>
+          <p:cNvPr id="9" name="TextBox 8"/>
           <p:cNvSpPr txBox="1"/>
           <p:nvPr/>
         </p:nvSpPr>
         <p:spPr>
           <a:xfrm>
-            <a:off x="914400" y="1097280"/>
-            <a:ext cx="10058400" cy="731520"/>
-          </a:xfrm>
-          <a:prstGeom prst="rect">
-            <a:avLst/>
-          </a:prstGeom>
-          <a:noFill/>
-        </p:spPr>
-        <p:txBody>
-          <a:bodyPr wrap="none">
-            <a:spAutoFit/>
-          </a:bodyPr>
-          <a:lstStyle/>
-          <a:p>
-            <a:pPr>
-              <a:defRPr sz="2000" b="1">
-                <a:solidFill>
-                  <a:srgbClr val="007BFF"/>
-                </a:solidFill>
-                <a:latin typeface="Calibri"/>
-              </a:defRPr>
-            </a:pPr>
-            <a:r>
-              <a:t>MODULE 8</a:t>
-            </a:r>
-          </a:p>
-        </p:txBody>
-      </p:sp>
-      <p:sp>
-        <p:nvSpPr>
-          <p:cNvPr id="4" name="TextBox 3"/>
-          <p:cNvSpPr txBox="1"/>
-          <p:nvPr/>
-        </p:nvSpPr>
-        <p:spPr>
-          <a:xfrm>
-            <a:off x="914400" y="2011680"/>
-            <a:ext cx="10058400" cy="1828800"/>
+            <a:off x="914400" y="2286000"/>
+            <a:ext cx="9144000" cy="2011680"/>
           </a:xfrm>
           <a:prstGeom prst="rect">
             <a:avLst/>
@@ -3209,12 +3446,12 @@
           </a:bodyPr>
           <a:lstStyle/>
           <a:p>
-            <a:pPr>
-              <a:defRPr sz="4400" b="1">
+            <a:pPr algn="l">
+              <a:defRPr sz="4000" b="1">
                 <a:solidFill>
                   <a:srgbClr val="FFFFFF"/>
                 </a:solidFill>
-                <a:latin typeface="Calibri"/>
+                <a:latin typeface="Inter"/>
               </a:defRPr>
             </a:pPr>
             <a:r>
@@ -3225,14 +3462,14 @@
       </p:sp>
       <p:sp>
         <p:nvSpPr>
-          <p:cNvPr id="5" name="TextBox 4"/>
+          <p:cNvPr id="10" name="TextBox 9"/>
           <p:cNvSpPr txBox="1"/>
           <p:nvPr/>
         </p:nvSpPr>
         <p:spPr>
           <a:xfrm>
-            <a:off x="914400" y="4114800"/>
-            <a:ext cx="9144000" cy="1371600"/>
+            <a:off x="914400" y="4389120"/>
+            <a:ext cx="8686800" cy="1371600"/>
           </a:xfrm>
           <a:prstGeom prst="rect">
             <a:avLst/>
@@ -3245,12 +3482,12 @@
           </a:bodyPr>
           <a:lstStyle/>
           <a:p>
-            <a:pPr>
-              <a:defRPr sz="2200">
-                <a:solidFill>
-                  <a:srgbClr val="CCCCCC"/>
-                </a:solidFill>
-                <a:latin typeface="Calibri"/>
+            <a:pPr algn="l">
+              <a:defRPr sz="1900" b="0">
+                <a:solidFill>
+                  <a:srgbClr val="A5B4FC"/>
+                </a:solidFill>
+                <a:latin typeface="Inter"/>
               </a:defRPr>
             </a:pPr>
             <a:r>
@@ -3261,14 +3498,14 @@
       </p:sp>
       <p:sp>
         <p:nvSpPr>
-          <p:cNvPr id="6" name="TextBox 5"/>
+          <p:cNvPr id="11" name="TextBox 10"/>
           <p:cNvSpPr txBox="1"/>
           <p:nvPr/>
         </p:nvSpPr>
         <p:spPr>
           <a:xfrm>
-            <a:off x="914400" y="6126480"/>
-            <a:ext cx="10058400" cy="457200"/>
+            <a:off x="731520" y="6400800"/>
+            <a:ext cx="10058400" cy="365760"/>
           </a:xfrm>
           <a:prstGeom prst="rect">
             <a:avLst/>
@@ -3281,16 +3518,16 @@
           </a:bodyPr>
           <a:lstStyle/>
           <a:p>
-            <a:pPr>
-              <a:defRPr sz="1200">
-                <a:solidFill>
-                  <a:srgbClr val="888888"/>
-                </a:solidFill>
-                <a:latin typeface="Calibri"/>
-              </a:defRPr>
-            </a:pPr>
-            <a:r>
-              <a:t>Copyright © 2026 Martin J. Gallagher. Licensed under GPL-3.0-or-later.</a:t>
+            <a:pPr algn="l">
+              <a:defRPr sz="1000" b="0">
+                <a:solidFill>
+                  <a:srgbClr val="6366F1"/>
+                </a:solidFill>
+                <a:latin typeface="Consolas"/>
+              </a:defRPr>
+            </a:pPr>
+            <a:r>
+              <a:t>© 2026 Martin J. Gallagher  |  GPL-3.0-or-later  |  doehelper.com</a:t>
             </a:r>
           </a:p>
         </p:txBody>
@@ -3309,7 +3546,7 @@
     <p:bg>
       <p:bgPr>
         <a:solidFill>
-          <a:srgbClr val="007BFF"/>
+          <a:srgbClr val="FAFAFA"/>
         </a:solidFill>
         <a:effectLst/>
       </p:bgPr>
@@ -3323,14 +3560,100 @@
       <p:grpSpPr/>
       <p:sp>
         <p:nvSpPr>
-          <p:cNvPr id="2" name="TextBox 1"/>
+          <p:cNvPr id="2" name="Rectangle 1"/>
+          <p:cNvSpPr/>
+          <p:nvPr/>
+        </p:nvSpPr>
+        <p:spPr>
+          <a:xfrm>
+            <a:off x="0" y="0"/>
+            <a:ext cx="12191695" cy="45720"/>
+          </a:xfrm>
+          <a:prstGeom prst="rect">
+            <a:avLst/>
+          </a:prstGeom>
+          <a:solidFill>
+            <a:srgbClr val="5046E5"/>
+          </a:solidFill>
+          <a:ln>
+            <a:noFill/>
+          </a:ln>
+        </p:spPr>
+        <p:style>
+          <a:lnRef idx="1">
+            <a:schemeClr val="accent1"/>
+          </a:lnRef>
+          <a:fillRef idx="3">
+            <a:schemeClr val="accent1"/>
+          </a:fillRef>
+          <a:effectRef idx="2">
+            <a:schemeClr val="accent1"/>
+          </a:effectRef>
+          <a:fontRef idx="minor">
+            <a:schemeClr val="lt1"/>
+          </a:fontRef>
+        </p:style>
+        <p:txBody>
+          <a:bodyPr rtlCol="0" anchor="ctr"/>
+          <a:lstStyle/>
+          <a:p>
+            <a:pPr algn="ctr"/>
+          </a:p>
+        </p:txBody>
+      </p:sp>
+      <p:sp>
+        <p:nvSpPr>
+          <p:cNvPr id="3" name="Rectangle 2"/>
+          <p:cNvSpPr/>
+          <p:nvPr/>
+        </p:nvSpPr>
+        <p:spPr>
+          <a:xfrm>
+            <a:off x="548640" y="411480"/>
+            <a:ext cx="36576" cy="502920"/>
+          </a:xfrm>
+          <a:prstGeom prst="rect">
+            <a:avLst/>
+          </a:prstGeom>
+          <a:solidFill>
+            <a:srgbClr val="5046E5"/>
+          </a:solidFill>
+          <a:ln>
+            <a:noFill/>
+          </a:ln>
+        </p:spPr>
+        <p:style>
+          <a:lnRef idx="1">
+            <a:schemeClr val="accent1"/>
+          </a:lnRef>
+          <a:fillRef idx="3">
+            <a:schemeClr val="accent1"/>
+          </a:fillRef>
+          <a:effectRef idx="2">
+            <a:schemeClr val="accent1"/>
+          </a:effectRef>
+          <a:fontRef idx="minor">
+            <a:schemeClr val="lt1"/>
+          </a:fontRef>
+        </p:style>
+        <p:txBody>
+          <a:bodyPr rtlCol="0" anchor="ctr"/>
+          <a:lstStyle/>
+          <a:p>
+            <a:pPr algn="ctr"/>
+          </a:p>
+        </p:txBody>
+      </p:sp>
+      <p:sp>
+        <p:nvSpPr>
+          <p:cNvPr id="4" name="TextBox 3"/>
           <p:cNvSpPr txBox="1"/>
           <p:nvPr/>
         </p:nvSpPr>
         <p:spPr>
           <a:xfrm>
-            <a:off x="914400" y="2286000"/>
-            <a:ext cx="10058400" cy="1828800"/>
+            <a:off x="777240" y="365760"/>
+            <a:ext cx="10058400" cy="640080"/>
           </a:xfrm>
           <a:prstGeom prst="rect">
             <a:avLst/>
@@ -3343,30 +3666,30 @@
           </a:bodyPr>
           <a:lstStyle/>
           <a:p>
-            <a:pPr algn="ctr">
-              <a:defRPr sz="4400" b="1">
-                <a:solidFill>
-                  <a:srgbClr val="FFFFFF"/>
-                </a:solidFill>
-                <a:latin typeface="Calibri"/>
-              </a:defRPr>
-            </a:pPr>
-            <a:r>
-              <a:t>Course Summary</a:t>
-            </a:r>
-          </a:p>
-        </p:txBody>
-      </p:sp>
-      <p:sp>
-        <p:nvSpPr>
-          <p:cNvPr id="3" name="TextBox 2"/>
+            <a:pPr algn="l">
+              <a:defRPr sz="2800" b="1">
+                <a:solidFill>
+                  <a:srgbClr val="111111"/>
+                </a:solidFill>
+                <a:latin typeface="Inter"/>
+              </a:defRPr>
+            </a:pPr>
+            <a:r>
+              <a:t>What You've Learned</a:t>
+            </a:r>
+          </a:p>
+        </p:txBody>
+      </p:sp>
+      <p:sp>
+        <p:nvSpPr>
+          <p:cNvPr id="5" name="TextBox 4"/>
           <p:cNvSpPr txBox="1"/>
           <p:nvPr/>
         </p:nvSpPr>
         <p:spPr>
           <a:xfrm>
-            <a:off x="1828800" y="4389120"/>
-            <a:ext cx="8229600" cy="914400"/>
+            <a:off x="822960" y="1188720"/>
+            <a:ext cx="10241280" cy="5120640"/>
           </a:xfrm>
           <a:prstGeom prst="rect">
             <a:avLst/>
@@ -3379,16 +3702,167 @@
           </a:bodyPr>
           <a:lstStyle/>
           <a:p>
-            <a:pPr algn="ctr">
-              <a:defRPr sz="2200">
-                <a:solidFill>
-                  <a:srgbClr val="DDEEFF"/>
-                </a:solidFill>
-                <a:latin typeface="Calibri"/>
-              </a:defRPr>
-            </a:pPr>
-            <a:r>
-              <a:t>Congratulations on completing the DOE Helper Training Course!</a:t>
+            <a:pPr>
+              <a:spcAft>
+                <a:spcPts val="600"/>
+              </a:spcAft>
+              <a:defRPr sz="1900">
+                <a:solidFill>
+                  <a:srgbClr val="333333"/>
+                </a:solidFill>
+                <a:latin typeface="Inter"/>
+              </a:defRPr>
+            </a:pPr>
+            <a:r>
+              <a:t>Module 1: Why DOE matters and the OVAT trap</a:t>
+            </a:r>
+          </a:p>
+          <a:p>
+            <a:pPr>
+              <a:spcAft>
+                <a:spcPts val="600"/>
+              </a:spcAft>
+              <a:defRPr sz="1900">
+                <a:solidFill>
+                  <a:srgbClr val="333333"/>
+                </a:solidFill>
+                <a:latin typeface="Inter"/>
+              </a:defRPr>
+            </a:pPr>
+            <a:r>
+              <a:t>Module 2: doe-helper installation and configuration</a:t>
+            </a:r>
+          </a:p>
+          <a:p>
+            <a:pPr>
+              <a:spcAft>
+                <a:spcPts val="600"/>
+              </a:spcAft>
+              <a:defRPr sz="1900">
+                <a:solidFill>
+                  <a:srgbClr val="333333"/>
+                </a:solidFill>
+                <a:latin typeface="Inter"/>
+              </a:defRPr>
+            </a:pPr>
+            <a:r>
+              <a:t>Module 3: Full factorial designs and interactions</a:t>
+            </a:r>
+          </a:p>
+          <a:p>
+            <a:pPr>
+              <a:spcAft>
+                <a:spcPts val="600"/>
+              </a:spcAft>
+              <a:defRPr sz="1900">
+                <a:solidFill>
+                  <a:srgbClr val="333333"/>
+                </a:solidFill>
+                <a:latin typeface="Inter"/>
+              </a:defRPr>
+            </a:pPr>
+            <a:r>
+              <a:t>Module 4: Screening designs for many factors</a:t>
+            </a:r>
+          </a:p>
+          <a:p>
+            <a:pPr>
+              <a:spcAft>
+                <a:spcPts val="600"/>
+              </a:spcAft>
+              <a:defRPr sz="1900">
+                <a:solidFill>
+                  <a:srgbClr val="333333"/>
+                </a:solidFill>
+                <a:latin typeface="Inter"/>
+              </a:defRPr>
+            </a:pPr>
+            <a:r>
+              <a:t>Module 5: Response surface methodology and optimisation</a:t>
+            </a:r>
+          </a:p>
+          <a:p>
+            <a:pPr>
+              <a:spcAft>
+                <a:spcPts val="600"/>
+              </a:spcAft>
+              <a:defRPr sz="1900">
+                <a:solidFill>
+                  <a:srgbClr val="333333"/>
+                </a:solidFill>
+                <a:latin typeface="Inter"/>
+              </a:defRPr>
+            </a:pPr>
+            <a:r>
+              <a:t>Module 6: Analysis, interpretation, and reporting</a:t>
+            </a:r>
+          </a:p>
+          <a:p>
+            <a:pPr>
+              <a:spcAft>
+                <a:spcPts val="600"/>
+              </a:spcAft>
+              <a:defRPr sz="1900">
+                <a:solidFill>
+                  <a:srgbClr val="333333"/>
+                </a:solidFill>
+                <a:latin typeface="Inter"/>
+              </a:defRPr>
+            </a:pPr>
+            <a:r>
+              <a:t>Module 7: Multi-response optimisation and advanced topics</a:t>
+            </a:r>
+          </a:p>
+          <a:p>
+            <a:pPr>
+              <a:spcAft>
+                <a:spcPts val="600"/>
+              </a:spcAft>
+              <a:defRPr sz="1900">
+                <a:solidFill>
+                  <a:srgbClr val="333333"/>
+                </a:solidFill>
+                <a:latin typeface="Inter"/>
+              </a:defRPr>
+            </a:pPr>
+            <a:r>
+              <a:t>Module 8: Complete DOE workflow from problem to solution</a:t>
+            </a:r>
+          </a:p>
+        </p:txBody>
+      </p:sp>
+      <p:sp>
+        <p:nvSpPr>
+          <p:cNvPr id="6" name="TextBox 5"/>
+          <p:cNvSpPr txBox="1"/>
+          <p:nvPr/>
+        </p:nvSpPr>
+        <p:spPr>
+          <a:xfrm>
+            <a:off x="731520" y="6400800"/>
+            <a:ext cx="10058400" cy="365760"/>
+          </a:xfrm>
+          <a:prstGeom prst="rect">
+            <a:avLst/>
+          </a:prstGeom>
+          <a:noFill/>
+        </p:spPr>
+        <p:txBody>
+          <a:bodyPr wrap="square">
+            <a:spAutoFit/>
+          </a:bodyPr>
+          <a:lstStyle/>
+          <a:p>
+            <a:pPr algn="l">
+              <a:defRPr sz="1000" b="0">
+                <a:solidFill>
+                  <a:srgbClr val="999999"/>
+                </a:solidFill>
+                <a:latin typeface="Consolas"/>
+              </a:defRPr>
+            </a:pPr>
+            <a:r>
+              <a:t>© 2026 Martin J. Gallagher  |  GPL-3.0-or-later  |  doehelper.com</a:t>
             </a:r>
           </a:p>
         </p:txBody>
@@ -3407,7 +3881,7 @@
     <p:bg>
       <p:bgPr>
         <a:solidFill>
-          <a:srgbClr val="FFFFFF"/>
+          <a:srgbClr val="FAFAFA"/>
         </a:solidFill>
         <a:effectLst/>
       </p:bgPr>
@@ -3428,13 +3902,13 @@
         <p:spPr>
           <a:xfrm>
             <a:off x="0" y="0"/>
-            <a:ext cx="12191695" cy="54864"/>
+            <a:ext cx="12191695" cy="45720"/>
           </a:xfrm>
           <a:prstGeom prst="rect">
             <a:avLst/>
           </a:prstGeom>
           <a:solidFill>
-            <a:srgbClr val="007BFF"/>
+            <a:srgbClr val="5046E5"/>
           </a:solidFill>
           <a:ln>
             <a:noFill/>
@@ -3464,14 +3938,57 @@
       </p:sp>
       <p:sp>
         <p:nvSpPr>
-          <p:cNvPr id="3" name="TextBox 2"/>
+          <p:cNvPr id="3" name="Rectangle 2"/>
+          <p:cNvSpPr/>
+          <p:nvPr/>
+        </p:nvSpPr>
+        <p:spPr>
+          <a:xfrm>
+            <a:off x="548640" y="411480"/>
+            <a:ext cx="36576" cy="502920"/>
+          </a:xfrm>
+          <a:prstGeom prst="rect">
+            <a:avLst/>
+          </a:prstGeom>
+          <a:solidFill>
+            <a:srgbClr val="5046E5"/>
+          </a:solidFill>
+          <a:ln>
+            <a:noFill/>
+          </a:ln>
+        </p:spPr>
+        <p:style>
+          <a:lnRef idx="1">
+            <a:schemeClr val="accent1"/>
+          </a:lnRef>
+          <a:fillRef idx="3">
+            <a:schemeClr val="accent1"/>
+          </a:fillRef>
+          <a:effectRef idx="2">
+            <a:schemeClr val="accent1"/>
+          </a:effectRef>
+          <a:fontRef idx="minor">
+            <a:schemeClr val="lt1"/>
+          </a:fontRef>
+        </p:style>
+        <p:txBody>
+          <a:bodyPr rtlCol="0" anchor="ctr"/>
+          <a:lstStyle/>
+          <a:p>
+            <a:pPr algn="ctr"/>
+          </a:p>
+        </p:txBody>
+      </p:sp>
+      <p:sp>
+        <p:nvSpPr>
+          <p:cNvPr id="4" name="TextBox 3"/>
           <p:cNvSpPr txBox="1"/>
           <p:nvPr/>
         </p:nvSpPr>
         <p:spPr>
           <a:xfrm>
-            <a:off x="731520" y="365760"/>
-            <a:ext cx="10515600" cy="822960"/>
+            <a:off x="777240" y="365760"/>
+            <a:ext cx="10058400" cy="640080"/>
           </a:xfrm>
           <a:prstGeom prst="rect">
             <a:avLst/>
@@ -3484,30 +4001,30 @@
           </a:bodyPr>
           <a:lstStyle/>
           <a:p>
-            <a:pPr>
-              <a:defRPr sz="3200" b="1">
-                <a:solidFill>
-                  <a:srgbClr val="222222"/>
-                </a:solidFill>
-                <a:latin typeface="Calibri"/>
-              </a:defRPr>
-            </a:pPr>
-            <a:r>
-              <a:t>What You've Learned</a:t>
-            </a:r>
-          </a:p>
-        </p:txBody>
-      </p:sp>
-      <p:sp>
-        <p:nvSpPr>
-          <p:cNvPr id="4" name="TextBox 3"/>
+            <a:pPr algn="l">
+              <a:defRPr sz="2800" b="1">
+                <a:solidFill>
+                  <a:srgbClr val="111111"/>
+                </a:solidFill>
+                <a:latin typeface="Inter"/>
+              </a:defRPr>
+            </a:pPr>
+            <a:r>
+              <a:t>doe-helper Command Reference</a:t>
+            </a:r>
+          </a:p>
+        </p:txBody>
+      </p:sp>
+      <p:sp>
+        <p:nvSpPr>
+          <p:cNvPr id="5" name="TextBox 4"/>
           <p:cNvSpPr txBox="1"/>
           <p:nvPr/>
         </p:nvSpPr>
         <p:spPr>
           <a:xfrm>
-            <a:off x="914400" y="1463040"/>
-            <a:ext cx="10058400" cy="4754880"/>
+            <a:off x="822960" y="1188720"/>
+            <a:ext cx="10241280" cy="5120640"/>
           </a:xfrm>
           <a:prstGeom prst="rect">
             <a:avLst/>
@@ -3522,129 +4039,197 @@
           <a:p>
             <a:pPr>
               <a:spcAft>
-                <a:spcPts val="800"/>
-              </a:spcAft>
-              <a:defRPr sz="2200" b="0">
-                <a:solidFill>
-                  <a:srgbClr val="222222"/>
-                </a:solidFill>
-                <a:latin typeface="Calibri"/>
-              </a:defRPr>
-            </a:pPr>
-            <a:r>
-              <a:t>Module 1: Why DOE matters and the OVAT trap</a:t>
+                <a:spcPts val="600"/>
+              </a:spcAft>
+              <a:defRPr sz="1900">
+                <a:solidFill>
+                  <a:srgbClr val="333333"/>
+                </a:solidFill>
+                <a:latin typeface="Inter"/>
+              </a:defRPr>
+            </a:pPr>
+            <a:r>
+              <a:t>doe init             Create experiment from template</a:t>
             </a:r>
           </a:p>
           <a:p>
             <a:pPr>
               <a:spcAft>
-                <a:spcPts val="800"/>
-              </a:spcAft>
-              <a:defRPr sz="2200" b="0">
-                <a:solidFill>
-                  <a:srgbClr val="222222"/>
-                </a:solidFill>
-                <a:latin typeface="Calibri"/>
-              </a:defRPr>
-            </a:pPr>
-            <a:r>
-              <a:t>Module 2: doe-helper installation and configuration</a:t>
+                <a:spcPts val="600"/>
+              </a:spcAft>
+              <a:defRPr sz="1900">
+                <a:solidFill>
+                  <a:srgbClr val="333333"/>
+                </a:solidFill>
+                <a:latin typeface="Inter"/>
+              </a:defRPr>
+            </a:pPr>
+            <a:r>
+              <a:t>doe generate         Create design matrix and runner script</a:t>
             </a:r>
           </a:p>
           <a:p>
             <a:pPr>
               <a:spcAft>
-                <a:spcPts val="800"/>
-              </a:spcAft>
-              <a:defRPr sz="2200" b="0">
-                <a:solidFill>
-                  <a:srgbClr val="222222"/>
-                </a:solidFill>
-                <a:latin typeface="Calibri"/>
-              </a:defRPr>
-            </a:pPr>
-            <a:r>
-              <a:t>Module 3: Full factorial designs and interactions</a:t>
+                <a:spcPts val="600"/>
+              </a:spcAft>
+              <a:defRPr sz="1900">
+                <a:solidFill>
+                  <a:srgbClr val="333333"/>
+                </a:solidFill>
+                <a:latin typeface="Inter"/>
+              </a:defRPr>
+            </a:pPr>
+            <a:r>
+              <a:t>doe record           Interactively record results</a:t>
             </a:r>
           </a:p>
           <a:p>
             <a:pPr>
               <a:spcAft>
-                <a:spcPts val="800"/>
-              </a:spcAft>
-              <a:defRPr sz="2200" b="0">
-                <a:solidFill>
-                  <a:srgbClr val="222222"/>
-                </a:solidFill>
-                <a:latin typeface="Calibri"/>
-              </a:defRPr>
-            </a:pPr>
-            <a:r>
-              <a:t>Module 4: Screening designs for many factors</a:t>
+                <a:spcPts val="600"/>
+              </a:spcAft>
+              <a:defRPr sz="1900">
+                <a:solidFill>
+                  <a:srgbClr val="333333"/>
+                </a:solidFill>
+                <a:latin typeface="Inter"/>
+              </a:defRPr>
+            </a:pPr>
+            <a:r>
+              <a:t>doe status           Show experiment progress</a:t>
             </a:r>
           </a:p>
           <a:p>
             <a:pPr>
               <a:spcAft>
-                <a:spcPts val="800"/>
-              </a:spcAft>
-              <a:defRPr sz="2200" b="0">
-                <a:solidFill>
-                  <a:srgbClr val="222222"/>
-                </a:solidFill>
-                <a:latin typeface="Calibri"/>
-              </a:defRPr>
-            </a:pPr>
-            <a:r>
-              <a:t>Module 5: Response surface methodology and optimisation</a:t>
+                <a:spcPts val="600"/>
+              </a:spcAft>
+              <a:defRPr sz="1900">
+                <a:solidFill>
+                  <a:srgbClr val="333333"/>
+                </a:solidFill>
+                <a:latin typeface="Inter"/>
+              </a:defRPr>
+            </a:pPr>
+            <a:r>
+              <a:t>doe info             Display design summary and metrics</a:t>
             </a:r>
           </a:p>
           <a:p>
             <a:pPr>
               <a:spcAft>
-                <a:spcPts val="800"/>
-              </a:spcAft>
-              <a:defRPr sz="2200" b="0">
-                <a:solidFill>
-                  <a:srgbClr val="222222"/>
-                </a:solidFill>
-                <a:latin typeface="Calibri"/>
-              </a:defRPr>
-            </a:pPr>
-            <a:r>
-              <a:t>Module 6: Analysis, interpretation, and reporting</a:t>
+                <a:spcPts val="600"/>
+              </a:spcAft>
+              <a:defRPr sz="1900">
+                <a:solidFill>
+                  <a:srgbClr val="333333"/>
+                </a:solidFill>
+                <a:latin typeface="Inter"/>
+              </a:defRPr>
+            </a:pPr>
+            <a:r>
+              <a:t>doe analyze          Run ANOVA, effects, diagnostics, plots</a:t>
             </a:r>
           </a:p>
           <a:p>
             <a:pPr>
               <a:spcAft>
-                <a:spcPts val="800"/>
-              </a:spcAft>
-              <a:defRPr sz="2200" b="0">
-                <a:solidFill>
-                  <a:srgbClr val="222222"/>
-                </a:solidFill>
-                <a:latin typeface="Calibri"/>
-              </a:defRPr>
-            </a:pPr>
-            <a:r>
-              <a:t>Module 7: Multi-response optimisation and advanced topics</a:t>
+                <a:spcPts val="600"/>
+              </a:spcAft>
+              <a:defRPr sz="1900">
+                <a:solidFill>
+                  <a:srgbClr val="333333"/>
+                </a:solidFill>
+                <a:latin typeface="Inter"/>
+              </a:defRPr>
+            </a:pPr>
+            <a:r>
+              <a:t>doe optimize         Find optimal factor settings</a:t>
             </a:r>
           </a:p>
           <a:p>
             <a:pPr>
               <a:spcAft>
-                <a:spcPts val="800"/>
-              </a:spcAft>
-              <a:defRPr sz="2200" b="0">
-                <a:solidFill>
-                  <a:srgbClr val="222222"/>
-                </a:solidFill>
-                <a:latin typeface="Calibri"/>
-              </a:defRPr>
-            </a:pPr>
-            <a:r>
-              <a:t>Module 8: Complete DOE workflow from problem to solution</a:t>
+                <a:spcPts val="600"/>
+              </a:spcAft>
+              <a:defRPr sz="1900">
+                <a:solidFill>
+                  <a:srgbClr val="333333"/>
+                </a:solidFill>
+                <a:latin typeface="Inter"/>
+              </a:defRPr>
+            </a:pPr>
+            <a:r>
+              <a:t>doe power            Compute statistical power</a:t>
+            </a:r>
+          </a:p>
+          <a:p>
+            <a:pPr>
+              <a:spcAft>
+                <a:spcPts val="600"/>
+              </a:spcAft>
+              <a:defRPr sz="1900">
+                <a:solidFill>
+                  <a:srgbClr val="333333"/>
+                </a:solidFill>
+                <a:latin typeface="Inter"/>
+              </a:defRPr>
+            </a:pPr>
+            <a:r>
+              <a:t>doe augment          Extend an existing design</a:t>
+            </a:r>
+          </a:p>
+          <a:p>
+            <a:pPr>
+              <a:spcAft>
+                <a:spcPts val="600"/>
+              </a:spcAft>
+              <a:defRPr sz="1900">
+                <a:solidFill>
+                  <a:srgbClr val="333333"/>
+                </a:solidFill>
+                <a:latin typeface="Inter"/>
+              </a:defRPr>
+            </a:pPr>
+            <a:r>
+              <a:t>doe report           Generate interactive HTML report</a:t>
+            </a:r>
+          </a:p>
+        </p:txBody>
+      </p:sp>
+      <p:sp>
+        <p:nvSpPr>
+          <p:cNvPr id="6" name="TextBox 5"/>
+          <p:cNvSpPr txBox="1"/>
+          <p:nvPr/>
+        </p:nvSpPr>
+        <p:spPr>
+          <a:xfrm>
+            <a:off x="731520" y="6400800"/>
+            <a:ext cx="10058400" cy="365760"/>
+          </a:xfrm>
+          <a:prstGeom prst="rect">
+            <a:avLst/>
+          </a:prstGeom>
+          <a:noFill/>
+        </p:spPr>
+        <p:txBody>
+          <a:bodyPr wrap="square">
+            <a:spAutoFit/>
+          </a:bodyPr>
+          <a:lstStyle/>
+          <a:p>
+            <a:pPr algn="l">
+              <a:defRPr sz="1000" b="0">
+                <a:solidFill>
+                  <a:srgbClr val="999999"/>
+                </a:solidFill>
+                <a:latin typeface="Consolas"/>
+              </a:defRPr>
+            </a:pPr>
+            <a:r>
+              <a:t>© 2026 Martin J. Gallagher  |  GPL-3.0-or-later  |  doehelper.com</a:t>
             </a:r>
           </a:p>
         </p:txBody>
@@ -3663,7 +4248,7 @@
     <p:bg>
       <p:bgPr>
         <a:solidFill>
-          <a:srgbClr val="FFFFFF"/>
+          <a:srgbClr val="1E1B4B"/>
         </a:solidFill>
         <a:effectLst/>
       </p:bgPr>
@@ -3683,14 +4268,14 @@
         </p:nvSpPr>
         <p:spPr>
           <a:xfrm>
-            <a:off x="0" y="0"/>
-            <a:ext cx="12191695" cy="54864"/>
+            <a:off x="3657600" y="0"/>
+            <a:ext cx="4572000" cy="6858000"/>
           </a:xfrm>
           <a:prstGeom prst="rect">
             <a:avLst/>
           </a:prstGeom>
           <a:solidFill>
-            <a:srgbClr val="007BFF"/>
+            <a:srgbClr val="312E81"/>
           </a:solidFill>
           <a:ln>
             <a:noFill/>
@@ -3720,317 +4305,20 @@
       </p:sp>
       <p:sp>
         <p:nvSpPr>
-          <p:cNvPr id="3" name="TextBox 2"/>
-          <p:cNvSpPr txBox="1"/>
-          <p:nvPr/>
-        </p:nvSpPr>
-        <p:spPr>
-          <a:xfrm>
-            <a:off x="731520" y="365760"/>
-            <a:ext cx="10515600" cy="822960"/>
+          <p:cNvPr id="3" name="Rectangle 2"/>
+          <p:cNvSpPr/>
+          <p:nvPr/>
+        </p:nvSpPr>
+        <p:spPr>
+          <a:xfrm>
+            <a:off x="8229600" y="0"/>
+            <a:ext cx="3962095" cy="6858000"/>
           </a:xfrm>
           <a:prstGeom prst="rect">
             <a:avLst/>
           </a:prstGeom>
-          <a:noFill/>
-        </p:spPr>
-        <p:txBody>
-          <a:bodyPr wrap="square">
-            <a:spAutoFit/>
-          </a:bodyPr>
-          <a:lstStyle/>
-          <a:p>
-            <a:pPr>
-              <a:defRPr sz="3200" b="1">
-                <a:solidFill>
-                  <a:srgbClr val="222222"/>
-                </a:solidFill>
-                <a:latin typeface="Calibri"/>
-              </a:defRPr>
-            </a:pPr>
-            <a:r>
-              <a:t>doe-helper Command Reference</a:t>
-            </a:r>
-          </a:p>
-        </p:txBody>
-      </p:sp>
-      <p:sp>
-        <p:nvSpPr>
-          <p:cNvPr id="4" name="TextBox 3"/>
-          <p:cNvSpPr txBox="1"/>
-          <p:nvPr/>
-        </p:nvSpPr>
-        <p:spPr>
-          <a:xfrm>
-            <a:off x="914400" y="1463040"/>
-            <a:ext cx="10058400" cy="4754880"/>
-          </a:xfrm>
-          <a:prstGeom prst="rect">
-            <a:avLst/>
-          </a:prstGeom>
-          <a:noFill/>
-        </p:spPr>
-        <p:txBody>
-          <a:bodyPr wrap="square">
-            <a:spAutoFit/>
-          </a:bodyPr>
-          <a:lstStyle/>
-          <a:p>
-            <a:pPr>
-              <a:spcAft>
-                <a:spcPts val="800"/>
-              </a:spcAft>
-              <a:defRPr sz="2200" b="0">
-                <a:solidFill>
-                  <a:srgbClr val="222222"/>
-                </a:solidFill>
-                <a:latin typeface="Calibri"/>
-              </a:defRPr>
-            </a:pPr>
-            <a:r>
-              <a:t>doe init         Create experiment from template</a:t>
-            </a:r>
-          </a:p>
-          <a:p>
-            <a:pPr>
-              <a:spcAft>
-                <a:spcPts val="800"/>
-              </a:spcAft>
-              <a:defRPr sz="2200" b="0">
-                <a:solidFill>
-                  <a:srgbClr val="222222"/>
-                </a:solidFill>
-                <a:latin typeface="Calibri"/>
-              </a:defRPr>
-            </a:pPr>
-            <a:r>
-              <a:t>doe generate     Create design matrix and runner script</a:t>
-            </a:r>
-          </a:p>
-          <a:p>
-            <a:pPr>
-              <a:spcAft>
-                <a:spcPts val="800"/>
-              </a:spcAft>
-              <a:defRPr sz="2200" b="0">
-                <a:solidFill>
-                  <a:srgbClr val="222222"/>
-                </a:solidFill>
-                <a:latin typeface="Calibri"/>
-              </a:defRPr>
-            </a:pPr>
-            <a:r>
-              <a:t>doe record       Interactively record experimental results</a:t>
-            </a:r>
-          </a:p>
-          <a:p>
-            <a:pPr>
-              <a:spcAft>
-                <a:spcPts val="800"/>
-              </a:spcAft>
-              <a:defRPr sz="2200" b="0">
-                <a:solidFill>
-                  <a:srgbClr val="222222"/>
-                </a:solidFill>
-                <a:latin typeface="Calibri"/>
-              </a:defRPr>
-            </a:pPr>
-            <a:r>
-              <a:t>doe status       Show experiment progress</a:t>
-            </a:r>
-          </a:p>
-          <a:p>
-            <a:pPr>
-              <a:spcAft>
-                <a:spcPts val="800"/>
-              </a:spcAft>
-              <a:defRPr sz="2200" b="0">
-                <a:solidFill>
-                  <a:srgbClr val="222222"/>
-                </a:solidFill>
-                <a:latin typeface="Calibri"/>
-              </a:defRPr>
-            </a:pPr>
-            <a:r>
-              <a:t>doe info         Display design summary and evaluation metrics</a:t>
-            </a:r>
-          </a:p>
-          <a:p>
-            <a:pPr>
-              <a:spcAft>
-                <a:spcPts val="800"/>
-              </a:spcAft>
-              <a:defRPr sz="2200" b="0">
-                <a:solidFill>
-                  <a:srgbClr val="222222"/>
-                </a:solidFill>
-                <a:latin typeface="Calibri"/>
-              </a:defRPr>
-            </a:pPr>
-            <a:r>
-              <a:t>doe analyze      Run ANOVA, effects, diagnostics, plots</a:t>
-            </a:r>
-          </a:p>
-          <a:p>
-            <a:pPr>
-              <a:spcAft>
-                <a:spcPts val="800"/>
-              </a:spcAft>
-              <a:defRPr sz="2200" b="0">
-                <a:solidFill>
-                  <a:srgbClr val="222222"/>
-                </a:solidFill>
-                <a:latin typeface="Calibri"/>
-              </a:defRPr>
-            </a:pPr>
-            <a:r>
-              <a:t>doe optimize     Find optimal factor settings</a:t>
-            </a:r>
-          </a:p>
-          <a:p>
-            <a:pPr>
-              <a:spcAft>
-                <a:spcPts val="800"/>
-              </a:spcAft>
-              <a:defRPr sz="2200" b="0">
-                <a:solidFill>
-                  <a:srgbClr val="222222"/>
-                </a:solidFill>
-                <a:latin typeface="Calibri"/>
-              </a:defRPr>
-            </a:pPr>
-            <a:r>
-              <a:t>doe power        Compute statistical power</a:t>
-            </a:r>
-          </a:p>
-          <a:p>
-            <a:pPr>
-              <a:spcAft>
-                <a:spcPts val="800"/>
-              </a:spcAft>
-              <a:defRPr sz="2200" b="0">
-                <a:solidFill>
-                  <a:srgbClr val="222222"/>
-                </a:solidFill>
-                <a:latin typeface="Calibri"/>
-              </a:defRPr>
-            </a:pPr>
-            <a:r>
-              <a:t>doe augment      Extend an existing design</a:t>
-            </a:r>
-          </a:p>
-          <a:p>
-            <a:pPr>
-              <a:spcAft>
-                <a:spcPts val="800"/>
-              </a:spcAft>
-              <a:defRPr sz="2200" b="0">
-                <a:solidFill>
-                  <a:srgbClr val="222222"/>
-                </a:solidFill>
-                <a:latin typeface="Calibri"/>
-              </a:defRPr>
-            </a:pPr>
-            <a:r>
-              <a:t>doe report       Generate interactive HTML report</a:t>
-            </a:r>
-          </a:p>
-          <a:p>
-            <a:pPr>
-              <a:spcAft>
-                <a:spcPts val="800"/>
-              </a:spcAft>
-              <a:defRPr sz="2200" b="0">
-                <a:solidFill>
-                  <a:srgbClr val="222222"/>
-                </a:solidFill>
-                <a:latin typeface="Calibri"/>
-              </a:defRPr>
-            </a:pPr>
-            <a:r>
-              <a:t>doe export-worksheet  Export design as CSV or markdown</a:t>
-            </a:r>
-          </a:p>
-        </p:txBody>
-      </p:sp>
-    </p:spTree>
-  </p:cSld>
-  <p:clrMapOvr>
-    <a:masterClrMapping/>
-  </p:clrMapOvr>
-</p:sld>
-</file>
-
-<file path=ppt/slides/slide13.xml><?xml version="1.0" encoding="utf-8"?>
-<p:sld xmlns:a="http://schemas.openxmlformats.org/drawingml/2006/main" xmlns:p="http://schemas.openxmlformats.org/presentationml/2006/main" xmlns:r="http://schemas.openxmlformats.org/officeDocument/2006/relationships">
-  <p:cSld>
-    <p:bg>
-      <p:bgPr>
-        <a:solidFill>
-          <a:srgbClr val="1A1A2E"/>
-        </a:solidFill>
-        <a:effectLst/>
-      </p:bgPr>
-    </p:bg>
-    <p:spTree>
-      <p:nvGrpSpPr>
-        <p:cNvPr id="1" name=""/>
-        <p:cNvGrpSpPr/>
-        <p:nvPr/>
-      </p:nvGrpSpPr>
-      <p:grpSpPr/>
-      <p:sp>
-        <p:nvSpPr>
-          <p:cNvPr id="2" name="TextBox 1"/>
-          <p:cNvSpPr txBox="1"/>
-          <p:nvPr/>
-        </p:nvSpPr>
-        <p:spPr>
-          <a:xfrm>
-            <a:off x="731520" y="457200"/>
-            <a:ext cx="10515600" cy="914400"/>
-          </a:xfrm>
-          <a:prstGeom prst="rect">
-            <a:avLst/>
-          </a:prstGeom>
-          <a:noFill/>
-        </p:spPr>
-        <p:txBody>
-          <a:bodyPr wrap="none">
-            <a:spAutoFit/>
-          </a:bodyPr>
-          <a:lstStyle/>
-          <a:p>
-            <a:pPr>
-              <a:defRPr sz="3400" b="1">
-                <a:solidFill>
-                  <a:srgbClr val="FFFFFF"/>
-                </a:solidFill>
-                <a:latin typeface="Calibri"/>
-              </a:defRPr>
-            </a:pPr>
-            <a:r>
-              <a:t>Next Steps</a:t>
-            </a:r>
-          </a:p>
-        </p:txBody>
-      </p:sp>
-      <p:sp>
-        <p:nvSpPr>
-          <p:cNvPr id="3" name="Rounded Rectangle 2"/>
-          <p:cNvSpPr/>
-          <p:nvPr/>
-        </p:nvSpPr>
-        <p:spPr>
-          <a:xfrm>
-            <a:off x="731520" y="1645920"/>
-            <a:ext cx="10515600" cy="822960"/>
-          </a:xfrm>
-          <a:prstGeom prst="roundRect">
-            <a:avLst/>
-          </a:prstGeom>
           <a:solidFill>
-            <a:srgbClr val="2A2A4A"/>
+            <a:srgbClr val="4338CA"/>
           </a:solidFill>
           <a:ln>
             <a:noFill/>
@@ -4051,39 +4339,65 @@
           </a:fontRef>
         </p:style>
         <p:txBody>
-          <a:bodyPr rtlCol="0" anchor="ctr" lIns="274320"/>
-          <a:lstStyle/>
-          <a:p>
-            <a:pPr algn="ctr">
-              <a:defRPr sz="2200">
+          <a:bodyPr rtlCol="0" anchor="ctr"/>
+          <a:lstStyle/>
+          <a:p>
+            <a:pPr algn="ctr"/>
+          </a:p>
+        </p:txBody>
+      </p:sp>
+      <p:sp>
+        <p:nvSpPr>
+          <p:cNvPr id="4" name="TextBox 3"/>
+          <p:cNvSpPr txBox="1"/>
+          <p:nvPr/>
+        </p:nvSpPr>
+        <p:spPr>
+          <a:xfrm>
+            <a:off x="731520" y="365760"/>
+            <a:ext cx="10058400" cy="640080"/>
+          </a:xfrm>
+          <a:prstGeom prst="rect">
+            <a:avLst/>
+          </a:prstGeom>
+          <a:noFill/>
+        </p:spPr>
+        <p:txBody>
+          <a:bodyPr wrap="square">
+            <a:spAutoFit/>
+          </a:bodyPr>
+          <a:lstStyle/>
+          <a:p>
+            <a:pPr algn="l">
+              <a:defRPr sz="3000" b="1">
                 <a:solidFill>
                   <a:srgbClr val="FFFFFF"/>
                 </a:solidFill>
-                <a:latin typeface="Calibri"/>
-              </a:defRPr>
-            </a:pPr>
-            <a:r>
-              <a:t>Practice with the 221 built-in use cases</a:t>
-            </a:r>
-          </a:p>
-        </p:txBody>
-      </p:sp>
-      <p:sp>
-        <p:nvSpPr>
-          <p:cNvPr id="4" name="Rounded Rectangle 3"/>
+                <a:latin typeface="Inter"/>
+              </a:defRPr>
+            </a:pPr>
+            <a:r>
+              <a:t>Next Steps</a:t>
+            </a:r>
+          </a:p>
+        </p:txBody>
+      </p:sp>
+      <p:sp>
+        <p:nvSpPr>
+          <p:cNvPr id="5" name="Rounded Rectangle 4"/>
           <p:cNvSpPr/>
           <p:nvPr/>
         </p:nvSpPr>
         <p:spPr>
           <a:xfrm>
-            <a:off x="731520" y="2606040"/>
-            <a:ext cx="10515600" cy="822960"/>
+            <a:off x="731520" y="1280160"/>
+            <a:ext cx="10515600" cy="777240"/>
           </a:xfrm>
           <a:prstGeom prst="roundRect">
             <a:avLst/>
           </a:prstGeom>
           <a:solidFill>
-            <a:srgbClr val="2A2A4A"/>
+            <a:srgbClr val="312E81"/>
           </a:solidFill>
           <a:ln>
             <a:noFill/>
@@ -4104,39 +4418,29 @@
           </a:fontRef>
         </p:style>
         <p:txBody>
-          <a:bodyPr rtlCol="0" anchor="ctr" lIns="274320"/>
-          <a:lstStyle/>
-          <a:p>
-            <a:pPr algn="ctr">
-              <a:defRPr sz="2200">
-                <a:solidFill>
-                  <a:srgbClr val="FFFFFF"/>
-                </a:solidFill>
-                <a:latin typeface="Calibri"/>
-              </a:defRPr>
-            </a:pPr>
-            <a:r>
-              <a:t>Visit doehelper.com for documentation and examples</a:t>
-            </a:r>
-          </a:p>
-        </p:txBody>
-      </p:sp>
-      <p:sp>
-        <p:nvSpPr>
-          <p:cNvPr id="5" name="Rounded Rectangle 4"/>
+          <a:bodyPr rtlCol="0" anchor="ctr"/>
+          <a:lstStyle/>
+          <a:p>
+            <a:pPr algn="ctr"/>
+          </a:p>
+        </p:txBody>
+      </p:sp>
+      <p:sp>
+        <p:nvSpPr>
+          <p:cNvPr id="6" name="Oval 5"/>
           <p:cNvSpPr/>
           <p:nvPr/>
         </p:nvSpPr>
         <p:spPr>
           <a:xfrm>
-            <a:off x="731520" y="3566160"/>
-            <a:ext cx="10515600" cy="822960"/>
-          </a:xfrm>
-          <a:prstGeom prst="roundRect">
+            <a:off x="1005840" y="1508760"/>
+            <a:ext cx="320040" cy="320040"/>
+          </a:xfrm>
+          <a:prstGeom prst="ellipse">
             <a:avLst/>
           </a:prstGeom>
           <a:solidFill>
-            <a:srgbClr val="2A2A4A"/>
+            <a:srgbClr val="5046E5"/>
           </a:solidFill>
           <a:ln>
             <a:noFill/>
@@ -4157,39 +4461,65 @@
           </a:fontRef>
         </p:style>
         <p:txBody>
-          <a:bodyPr rtlCol="0" anchor="ctr" lIns="274320"/>
-          <a:lstStyle/>
-          <a:p>
-            <a:pPr algn="ctr">
-              <a:defRPr sz="2200">
+          <a:bodyPr rtlCol="0" anchor="ctr"/>
+          <a:lstStyle/>
+          <a:p>
+            <a:pPr algn="ctr"/>
+          </a:p>
+        </p:txBody>
+      </p:sp>
+      <p:sp>
+        <p:nvSpPr>
+          <p:cNvPr id="7" name="TextBox 6"/>
+          <p:cNvSpPr txBox="1"/>
+          <p:nvPr/>
+        </p:nvSpPr>
+        <p:spPr>
+          <a:xfrm>
+            <a:off x="1554480" y="1325880"/>
+            <a:ext cx="9418320" cy="777240"/>
+          </a:xfrm>
+          <a:prstGeom prst="rect">
+            <a:avLst/>
+          </a:prstGeom>
+          <a:noFill/>
+        </p:spPr>
+        <p:txBody>
+          <a:bodyPr wrap="square" anchor="ctr">
+            <a:spAutoFit/>
+          </a:bodyPr>
+          <a:lstStyle/>
+          <a:p>
+            <a:pPr algn="l">
+              <a:defRPr sz="1800" b="0">
                 <a:solidFill>
                   <a:srgbClr val="FFFFFF"/>
                 </a:solidFill>
-                <a:latin typeface="Calibri"/>
-              </a:defRPr>
-            </a:pPr>
-            <a:r>
-              <a:t>Apply DOE to a real problem in your work</a:t>
-            </a:r>
-          </a:p>
-        </p:txBody>
-      </p:sp>
-      <p:sp>
-        <p:nvSpPr>
-          <p:cNvPr id="6" name="Rounded Rectangle 5"/>
+                <a:latin typeface="Inter"/>
+              </a:defRPr>
+            </a:pPr>
+            <a:r>
+              <a:t>Practice with the 221 built-in use cases</a:t>
+            </a:r>
+          </a:p>
+        </p:txBody>
+      </p:sp>
+      <p:sp>
+        <p:nvSpPr>
+          <p:cNvPr id="8" name="Rounded Rectangle 7"/>
           <p:cNvSpPr/>
           <p:nvPr/>
         </p:nvSpPr>
         <p:spPr>
           <a:xfrm>
-            <a:off x="731520" y="4526280"/>
-            <a:ext cx="10515600" cy="822960"/>
+            <a:off x="731520" y="2167128"/>
+            <a:ext cx="10515600" cy="777240"/>
           </a:xfrm>
           <a:prstGeom prst="roundRect">
             <a:avLst/>
           </a:prstGeom>
           <a:solidFill>
-            <a:srgbClr val="2A2A4A"/>
+            <a:srgbClr val="312E81"/>
           </a:solidFill>
           <a:ln>
             <a:noFill/>
@@ -4210,39 +4540,29 @@
           </a:fontRef>
         </p:style>
         <p:txBody>
-          <a:bodyPr rtlCol="0" anchor="ctr" lIns="274320"/>
-          <a:lstStyle/>
-          <a:p>
-            <a:pPr algn="ctr">
-              <a:defRPr sz="2200">
-                <a:solidFill>
-                  <a:srgbClr val="FFFFFF"/>
-                </a:solidFill>
-                <a:latin typeface="Calibri"/>
-              </a:defRPr>
-            </a:pPr>
-            <a:r>
-              <a:t>Start small: 2-3 factors, full factorial</a:t>
-            </a:r>
-          </a:p>
-        </p:txBody>
-      </p:sp>
-      <p:sp>
-        <p:nvSpPr>
-          <p:cNvPr id="7" name="Rounded Rectangle 6"/>
+          <a:bodyPr rtlCol="0" anchor="ctr"/>
+          <a:lstStyle/>
+          <a:p>
+            <a:pPr algn="ctr"/>
+          </a:p>
+        </p:txBody>
+      </p:sp>
+      <p:sp>
+        <p:nvSpPr>
+          <p:cNvPr id="9" name="Oval 8"/>
           <p:cNvSpPr/>
           <p:nvPr/>
         </p:nvSpPr>
         <p:spPr>
           <a:xfrm>
-            <a:off x="731520" y="5486400"/>
-            <a:ext cx="10515600" cy="822960"/>
-          </a:xfrm>
-          <a:prstGeom prst="roundRect">
+            <a:off x="1005840" y="2395728"/>
+            <a:ext cx="320040" cy="320040"/>
+          </a:xfrm>
+          <a:prstGeom prst="ellipse">
             <a:avLst/>
           </a:prstGeom>
           <a:solidFill>
-            <a:srgbClr val="2A2A4A"/>
+            <a:srgbClr val="5046E5"/>
           </a:solidFill>
           <a:ln>
             <a:noFill/>
@@ -4263,19 +4583,447 @@
           </a:fontRef>
         </p:style>
         <p:txBody>
-          <a:bodyPr rtlCol="0" anchor="ctr" lIns="274320"/>
-          <a:lstStyle/>
-          <a:p>
-            <a:pPr algn="ctr">
-              <a:defRPr sz="2200">
+          <a:bodyPr rtlCol="0" anchor="ctr"/>
+          <a:lstStyle/>
+          <a:p>
+            <a:pPr algn="ctr"/>
+          </a:p>
+        </p:txBody>
+      </p:sp>
+      <p:sp>
+        <p:nvSpPr>
+          <p:cNvPr id="10" name="TextBox 9"/>
+          <p:cNvSpPr txBox="1"/>
+          <p:nvPr/>
+        </p:nvSpPr>
+        <p:spPr>
+          <a:xfrm>
+            <a:off x="1554480" y="2212848"/>
+            <a:ext cx="9418320" cy="777240"/>
+          </a:xfrm>
+          <a:prstGeom prst="rect">
+            <a:avLst/>
+          </a:prstGeom>
+          <a:noFill/>
+        </p:spPr>
+        <p:txBody>
+          <a:bodyPr wrap="square" anchor="ctr">
+            <a:spAutoFit/>
+          </a:bodyPr>
+          <a:lstStyle/>
+          <a:p>
+            <a:pPr algn="l">
+              <a:defRPr sz="1800" b="0">
                 <a:solidFill>
                   <a:srgbClr val="FFFFFF"/>
                 </a:solidFill>
-                <a:latin typeface="Calibri"/>
-              </a:defRPr>
-            </a:pPr>
-            <a:r>
-              <a:t>Remember: a planned experiment beats trial-and-error every time</a:t>
+                <a:latin typeface="Inter"/>
+              </a:defRPr>
+            </a:pPr>
+            <a:r>
+              <a:t>Visit doehelper.com for documentation and examples</a:t>
+            </a:r>
+          </a:p>
+        </p:txBody>
+      </p:sp>
+      <p:sp>
+        <p:nvSpPr>
+          <p:cNvPr id="11" name="Rounded Rectangle 10"/>
+          <p:cNvSpPr/>
+          <p:nvPr/>
+        </p:nvSpPr>
+        <p:spPr>
+          <a:xfrm>
+            <a:off x="731520" y="3054096"/>
+            <a:ext cx="10515600" cy="777240"/>
+          </a:xfrm>
+          <a:prstGeom prst="roundRect">
+            <a:avLst/>
+          </a:prstGeom>
+          <a:solidFill>
+            <a:srgbClr val="312E81"/>
+          </a:solidFill>
+          <a:ln>
+            <a:noFill/>
+          </a:ln>
+        </p:spPr>
+        <p:style>
+          <a:lnRef idx="1">
+            <a:schemeClr val="accent1"/>
+          </a:lnRef>
+          <a:fillRef idx="3">
+            <a:schemeClr val="accent1"/>
+          </a:fillRef>
+          <a:effectRef idx="2">
+            <a:schemeClr val="accent1"/>
+          </a:effectRef>
+          <a:fontRef idx="minor">
+            <a:schemeClr val="lt1"/>
+          </a:fontRef>
+        </p:style>
+        <p:txBody>
+          <a:bodyPr rtlCol="0" anchor="ctr"/>
+          <a:lstStyle/>
+          <a:p>
+            <a:pPr algn="ctr"/>
+          </a:p>
+        </p:txBody>
+      </p:sp>
+      <p:sp>
+        <p:nvSpPr>
+          <p:cNvPr id="12" name="Oval 11"/>
+          <p:cNvSpPr/>
+          <p:nvPr/>
+        </p:nvSpPr>
+        <p:spPr>
+          <a:xfrm>
+            <a:off x="1005840" y="3282696"/>
+            <a:ext cx="320040" cy="320040"/>
+          </a:xfrm>
+          <a:prstGeom prst="ellipse">
+            <a:avLst/>
+          </a:prstGeom>
+          <a:solidFill>
+            <a:srgbClr val="5046E5"/>
+          </a:solidFill>
+          <a:ln>
+            <a:noFill/>
+          </a:ln>
+        </p:spPr>
+        <p:style>
+          <a:lnRef idx="1">
+            <a:schemeClr val="accent1"/>
+          </a:lnRef>
+          <a:fillRef idx="3">
+            <a:schemeClr val="accent1"/>
+          </a:fillRef>
+          <a:effectRef idx="2">
+            <a:schemeClr val="accent1"/>
+          </a:effectRef>
+          <a:fontRef idx="minor">
+            <a:schemeClr val="lt1"/>
+          </a:fontRef>
+        </p:style>
+        <p:txBody>
+          <a:bodyPr rtlCol="0" anchor="ctr"/>
+          <a:lstStyle/>
+          <a:p>
+            <a:pPr algn="ctr"/>
+          </a:p>
+        </p:txBody>
+      </p:sp>
+      <p:sp>
+        <p:nvSpPr>
+          <p:cNvPr id="13" name="TextBox 12"/>
+          <p:cNvSpPr txBox="1"/>
+          <p:nvPr/>
+        </p:nvSpPr>
+        <p:spPr>
+          <a:xfrm>
+            <a:off x="1554480" y="3099816"/>
+            <a:ext cx="9418320" cy="777240"/>
+          </a:xfrm>
+          <a:prstGeom prst="rect">
+            <a:avLst/>
+          </a:prstGeom>
+          <a:noFill/>
+        </p:spPr>
+        <p:txBody>
+          <a:bodyPr wrap="square" anchor="ctr">
+            <a:spAutoFit/>
+          </a:bodyPr>
+          <a:lstStyle/>
+          <a:p>
+            <a:pPr algn="l">
+              <a:defRPr sz="1800" b="0">
+                <a:solidFill>
+                  <a:srgbClr val="FFFFFF"/>
+                </a:solidFill>
+                <a:latin typeface="Inter"/>
+              </a:defRPr>
+            </a:pPr>
+            <a:r>
+              <a:t>Apply DOE to a real problem in your work</a:t>
+            </a:r>
+          </a:p>
+        </p:txBody>
+      </p:sp>
+      <p:sp>
+        <p:nvSpPr>
+          <p:cNvPr id="14" name="Rounded Rectangle 13"/>
+          <p:cNvSpPr/>
+          <p:nvPr/>
+        </p:nvSpPr>
+        <p:spPr>
+          <a:xfrm>
+            <a:off x="731520" y="3941064"/>
+            <a:ext cx="10515600" cy="777240"/>
+          </a:xfrm>
+          <a:prstGeom prst="roundRect">
+            <a:avLst/>
+          </a:prstGeom>
+          <a:solidFill>
+            <a:srgbClr val="312E81"/>
+          </a:solidFill>
+          <a:ln>
+            <a:noFill/>
+          </a:ln>
+        </p:spPr>
+        <p:style>
+          <a:lnRef idx="1">
+            <a:schemeClr val="accent1"/>
+          </a:lnRef>
+          <a:fillRef idx="3">
+            <a:schemeClr val="accent1"/>
+          </a:fillRef>
+          <a:effectRef idx="2">
+            <a:schemeClr val="accent1"/>
+          </a:effectRef>
+          <a:fontRef idx="minor">
+            <a:schemeClr val="lt1"/>
+          </a:fontRef>
+        </p:style>
+        <p:txBody>
+          <a:bodyPr rtlCol="0" anchor="ctr"/>
+          <a:lstStyle/>
+          <a:p>
+            <a:pPr algn="ctr"/>
+          </a:p>
+        </p:txBody>
+      </p:sp>
+      <p:sp>
+        <p:nvSpPr>
+          <p:cNvPr id="15" name="Oval 14"/>
+          <p:cNvSpPr/>
+          <p:nvPr/>
+        </p:nvSpPr>
+        <p:spPr>
+          <a:xfrm>
+            <a:off x="1005840" y="4169664"/>
+            <a:ext cx="320040" cy="320040"/>
+          </a:xfrm>
+          <a:prstGeom prst="ellipse">
+            <a:avLst/>
+          </a:prstGeom>
+          <a:solidFill>
+            <a:srgbClr val="5046E5"/>
+          </a:solidFill>
+          <a:ln>
+            <a:noFill/>
+          </a:ln>
+        </p:spPr>
+        <p:style>
+          <a:lnRef idx="1">
+            <a:schemeClr val="accent1"/>
+          </a:lnRef>
+          <a:fillRef idx="3">
+            <a:schemeClr val="accent1"/>
+          </a:fillRef>
+          <a:effectRef idx="2">
+            <a:schemeClr val="accent1"/>
+          </a:effectRef>
+          <a:fontRef idx="minor">
+            <a:schemeClr val="lt1"/>
+          </a:fontRef>
+        </p:style>
+        <p:txBody>
+          <a:bodyPr rtlCol="0" anchor="ctr"/>
+          <a:lstStyle/>
+          <a:p>
+            <a:pPr algn="ctr"/>
+          </a:p>
+        </p:txBody>
+      </p:sp>
+      <p:sp>
+        <p:nvSpPr>
+          <p:cNvPr id="16" name="TextBox 15"/>
+          <p:cNvSpPr txBox="1"/>
+          <p:nvPr/>
+        </p:nvSpPr>
+        <p:spPr>
+          <a:xfrm>
+            <a:off x="1554480" y="3986784"/>
+            <a:ext cx="9418320" cy="777240"/>
+          </a:xfrm>
+          <a:prstGeom prst="rect">
+            <a:avLst/>
+          </a:prstGeom>
+          <a:noFill/>
+        </p:spPr>
+        <p:txBody>
+          <a:bodyPr wrap="square" anchor="ctr">
+            <a:spAutoFit/>
+          </a:bodyPr>
+          <a:lstStyle/>
+          <a:p>
+            <a:pPr algn="l">
+              <a:defRPr sz="1800" b="0">
+                <a:solidFill>
+                  <a:srgbClr val="FFFFFF"/>
+                </a:solidFill>
+                <a:latin typeface="Inter"/>
+              </a:defRPr>
+            </a:pPr>
+            <a:r>
+              <a:t>Start small: 2–3 factors, full factorial</a:t>
+            </a:r>
+          </a:p>
+        </p:txBody>
+      </p:sp>
+      <p:sp>
+        <p:nvSpPr>
+          <p:cNvPr id="17" name="Rounded Rectangle 16"/>
+          <p:cNvSpPr/>
+          <p:nvPr/>
+        </p:nvSpPr>
+        <p:spPr>
+          <a:xfrm>
+            <a:off x="731520" y="4828032"/>
+            <a:ext cx="10515600" cy="777240"/>
+          </a:xfrm>
+          <a:prstGeom prst="roundRect">
+            <a:avLst/>
+          </a:prstGeom>
+          <a:solidFill>
+            <a:srgbClr val="312E81"/>
+          </a:solidFill>
+          <a:ln>
+            <a:noFill/>
+          </a:ln>
+        </p:spPr>
+        <p:style>
+          <a:lnRef idx="1">
+            <a:schemeClr val="accent1"/>
+          </a:lnRef>
+          <a:fillRef idx="3">
+            <a:schemeClr val="accent1"/>
+          </a:fillRef>
+          <a:effectRef idx="2">
+            <a:schemeClr val="accent1"/>
+          </a:effectRef>
+          <a:fontRef idx="minor">
+            <a:schemeClr val="lt1"/>
+          </a:fontRef>
+        </p:style>
+        <p:txBody>
+          <a:bodyPr rtlCol="0" anchor="ctr"/>
+          <a:lstStyle/>
+          <a:p>
+            <a:pPr algn="ctr"/>
+          </a:p>
+        </p:txBody>
+      </p:sp>
+      <p:sp>
+        <p:nvSpPr>
+          <p:cNvPr id="18" name="Oval 17"/>
+          <p:cNvSpPr/>
+          <p:nvPr/>
+        </p:nvSpPr>
+        <p:spPr>
+          <a:xfrm>
+            <a:off x="1005840" y="5056632"/>
+            <a:ext cx="320040" cy="320040"/>
+          </a:xfrm>
+          <a:prstGeom prst="ellipse">
+            <a:avLst/>
+          </a:prstGeom>
+          <a:solidFill>
+            <a:srgbClr val="5046E5"/>
+          </a:solidFill>
+          <a:ln>
+            <a:noFill/>
+          </a:ln>
+        </p:spPr>
+        <p:style>
+          <a:lnRef idx="1">
+            <a:schemeClr val="accent1"/>
+          </a:lnRef>
+          <a:fillRef idx="3">
+            <a:schemeClr val="accent1"/>
+          </a:fillRef>
+          <a:effectRef idx="2">
+            <a:schemeClr val="accent1"/>
+          </a:effectRef>
+          <a:fontRef idx="minor">
+            <a:schemeClr val="lt1"/>
+          </a:fontRef>
+        </p:style>
+        <p:txBody>
+          <a:bodyPr rtlCol="0" anchor="ctr"/>
+          <a:lstStyle/>
+          <a:p>
+            <a:pPr algn="ctr"/>
+          </a:p>
+        </p:txBody>
+      </p:sp>
+      <p:sp>
+        <p:nvSpPr>
+          <p:cNvPr id="19" name="TextBox 18"/>
+          <p:cNvSpPr txBox="1"/>
+          <p:nvPr/>
+        </p:nvSpPr>
+        <p:spPr>
+          <a:xfrm>
+            <a:off x="1554480" y="4873752"/>
+            <a:ext cx="9418320" cy="777240"/>
+          </a:xfrm>
+          <a:prstGeom prst="rect">
+            <a:avLst/>
+          </a:prstGeom>
+          <a:noFill/>
+        </p:spPr>
+        <p:txBody>
+          <a:bodyPr wrap="square" anchor="ctr">
+            <a:spAutoFit/>
+          </a:bodyPr>
+          <a:lstStyle/>
+          <a:p>
+            <a:pPr algn="l">
+              <a:defRPr sz="1800" b="0">
+                <a:solidFill>
+                  <a:srgbClr val="FFFFFF"/>
+                </a:solidFill>
+                <a:latin typeface="Inter"/>
+              </a:defRPr>
+            </a:pPr>
+            <a:r>
+              <a:t>A planned experiment beats trial-and-error every time</a:t>
+            </a:r>
+          </a:p>
+        </p:txBody>
+      </p:sp>
+      <p:sp>
+        <p:nvSpPr>
+          <p:cNvPr id="20" name="TextBox 19"/>
+          <p:cNvSpPr txBox="1"/>
+          <p:nvPr/>
+        </p:nvSpPr>
+        <p:spPr>
+          <a:xfrm>
+            <a:off x="731520" y="6400800"/>
+            <a:ext cx="10058400" cy="365760"/>
+          </a:xfrm>
+          <a:prstGeom prst="rect">
+            <a:avLst/>
+          </a:prstGeom>
+          <a:noFill/>
+        </p:spPr>
+        <p:txBody>
+          <a:bodyPr wrap="square">
+            <a:spAutoFit/>
+          </a:bodyPr>
+          <a:lstStyle/>
+          <a:p>
+            <a:pPr algn="l">
+              <a:defRPr sz="1000" b="0">
+                <a:solidFill>
+                  <a:srgbClr val="6366F1"/>
+                </a:solidFill>
+                <a:latin typeface="Consolas"/>
+              </a:defRPr>
+            </a:pPr>
+            <a:r>
+              <a:t>© 2026 Martin J. Gallagher  |  GPL-3.0-or-later</a:t>
             </a:r>
           </a:p>
         </p:txBody>
@@ -4294,7 +5042,7 @@
     <p:bg>
       <p:bgPr>
         <a:solidFill>
-          <a:srgbClr val="FFFFFF"/>
+          <a:srgbClr val="FAFAFA"/>
         </a:solidFill>
         <a:effectLst/>
       </p:bgPr>
@@ -4315,13 +5063,13 @@
         <p:spPr>
           <a:xfrm>
             <a:off x="0" y="0"/>
-            <a:ext cx="12191695" cy="54864"/>
+            <a:ext cx="12191695" cy="45720"/>
           </a:xfrm>
           <a:prstGeom prst="rect">
             <a:avLst/>
           </a:prstGeom>
           <a:solidFill>
-            <a:srgbClr val="007BFF"/>
+            <a:srgbClr val="5046E5"/>
           </a:solidFill>
           <a:ln>
             <a:noFill/>
@@ -4351,14 +5099,57 @@
       </p:sp>
       <p:sp>
         <p:nvSpPr>
-          <p:cNvPr id="3" name="TextBox 2"/>
+          <p:cNvPr id="3" name="Rectangle 2"/>
+          <p:cNvSpPr/>
+          <p:nvPr/>
+        </p:nvSpPr>
+        <p:spPr>
+          <a:xfrm>
+            <a:off x="548640" y="411480"/>
+            <a:ext cx="36576" cy="502920"/>
+          </a:xfrm>
+          <a:prstGeom prst="rect">
+            <a:avLst/>
+          </a:prstGeom>
+          <a:solidFill>
+            <a:srgbClr val="5046E5"/>
+          </a:solidFill>
+          <a:ln>
+            <a:noFill/>
+          </a:ln>
+        </p:spPr>
+        <p:style>
+          <a:lnRef idx="1">
+            <a:schemeClr val="accent1"/>
+          </a:lnRef>
+          <a:fillRef idx="3">
+            <a:schemeClr val="accent1"/>
+          </a:fillRef>
+          <a:effectRef idx="2">
+            <a:schemeClr val="accent1"/>
+          </a:effectRef>
+          <a:fontRef idx="minor">
+            <a:schemeClr val="lt1"/>
+          </a:fontRef>
+        </p:style>
+        <p:txBody>
+          <a:bodyPr rtlCol="0" anchor="ctr"/>
+          <a:lstStyle/>
+          <a:p>
+            <a:pPr algn="ctr"/>
+          </a:p>
+        </p:txBody>
+      </p:sp>
+      <p:sp>
+        <p:nvSpPr>
+          <p:cNvPr id="4" name="TextBox 3"/>
           <p:cNvSpPr txBox="1"/>
           <p:nvPr/>
         </p:nvSpPr>
         <p:spPr>
           <a:xfrm>
-            <a:off x="731520" y="365760"/>
-            <a:ext cx="10515600" cy="822960"/>
+            <a:off x="777240" y="365760"/>
+            <a:ext cx="10058400" cy="640080"/>
           </a:xfrm>
           <a:prstGeom prst="rect">
             <a:avLst/>
@@ -4371,12 +5162,12 @@
           </a:bodyPr>
           <a:lstStyle/>
           <a:p>
-            <a:pPr>
-              <a:defRPr sz="3200" b="1">
-                <a:solidFill>
-                  <a:srgbClr val="222222"/>
-                </a:solidFill>
-                <a:latin typeface="Calibri"/>
+            <a:pPr algn="l">
+              <a:defRPr sz="2800" b="1">
+                <a:solidFill>
+                  <a:srgbClr val="111111"/>
+                </a:solidFill>
+                <a:latin typeface="Inter"/>
               </a:defRPr>
             </a:pPr>
             <a:r>
@@ -4387,14 +5178,14 @@
       </p:sp>
       <p:sp>
         <p:nvSpPr>
-          <p:cNvPr id="4" name="TextBox 3"/>
+          <p:cNvPr id="5" name="TextBox 4"/>
           <p:cNvSpPr txBox="1"/>
           <p:nvPr/>
         </p:nvSpPr>
         <p:spPr>
           <a:xfrm>
-            <a:off x="914400" y="1463040"/>
-            <a:ext cx="10058400" cy="4754880"/>
+            <a:off x="822960" y="1188720"/>
+            <a:ext cx="10241280" cy="5120640"/>
           </a:xfrm>
           <a:prstGeom prst="rect">
             <a:avLst/>
@@ -4409,13 +5200,13 @@
           <a:p>
             <a:pPr>
               <a:spcAft>
-                <a:spcPts val="800"/>
-              </a:spcAft>
-              <a:defRPr sz="2200" b="0">
-                <a:solidFill>
-                  <a:srgbClr val="222222"/>
-                </a:solidFill>
-                <a:latin typeface="Calibri"/>
+                <a:spcPts val="600"/>
+              </a:spcAft>
+              <a:defRPr sz="1900">
+                <a:solidFill>
+                  <a:srgbClr val="333333"/>
+                </a:solidFill>
+                <a:latin typeface="Inter"/>
               </a:defRPr>
             </a:pPr>
             <a:r>
@@ -4425,13 +5216,13 @@
           <a:p>
             <a:pPr>
               <a:spcAft>
-                <a:spcPts val="800"/>
-              </a:spcAft>
-              <a:defRPr sz="2200" b="0">
-                <a:solidFill>
-                  <a:srgbClr val="222222"/>
-                </a:solidFill>
-                <a:latin typeface="Calibri"/>
+                <a:spcPts val="600"/>
+              </a:spcAft>
+              <a:defRPr sz="1900">
+                <a:solidFill>
+                  <a:srgbClr val="333333"/>
+                </a:solidFill>
+                <a:latin typeface="Inter"/>
               </a:defRPr>
             </a:pPr>
             <a:r>
@@ -4441,13 +5232,13 @@
           <a:p>
             <a:pPr>
               <a:spcAft>
-                <a:spcPts val="800"/>
-              </a:spcAft>
-              <a:defRPr sz="2200" b="0">
-                <a:solidFill>
-                  <a:srgbClr val="222222"/>
-                </a:solidFill>
-                <a:latin typeface="Calibri"/>
+                <a:spcPts val="600"/>
+              </a:spcAft>
+              <a:defRPr sz="1900">
+                <a:solidFill>
+                  <a:srgbClr val="333333"/>
+                </a:solidFill>
+                <a:latin typeface="Inter"/>
               </a:defRPr>
             </a:pPr>
             <a:r>
@@ -4457,13 +5248,13 @@
           <a:p>
             <a:pPr lvl="1">
               <a:spcAft>
-                <a:spcPts val="800"/>
-              </a:spcAft>
-              <a:defRPr sz="1900">
-                <a:solidFill>
-                  <a:srgbClr val="222222"/>
-                </a:solidFill>
-                <a:latin typeface="Calibri"/>
+                <a:spcPts val="600"/>
+              </a:spcAft>
+              <a:defRPr sz="1700">
+                <a:solidFill>
+                  <a:srgbClr val="666666"/>
+                </a:solidFill>
+                <a:latin typeface="Inter"/>
               </a:defRPr>
             </a:pPr>
             <a:r>
@@ -4473,13 +5264,13 @@
           <a:p>
             <a:pPr lvl="1">
               <a:spcAft>
-                <a:spcPts val="800"/>
-              </a:spcAft>
-              <a:defRPr sz="1900">
-                <a:solidFill>
-                  <a:srgbClr val="222222"/>
-                </a:solidFill>
-                <a:latin typeface="Calibri"/>
+                <a:spcPts val="600"/>
+              </a:spcAft>
+              <a:defRPr sz="1700">
+                <a:solidFill>
+                  <a:srgbClr val="666666"/>
+                </a:solidFill>
+                <a:latin typeface="Inter"/>
               </a:defRPr>
             </a:pPr>
             <a:r>
@@ -4489,13 +5280,13 @@
           <a:p>
             <a:pPr lvl="1">
               <a:spcAft>
-                <a:spcPts val="800"/>
-              </a:spcAft>
-              <a:defRPr sz="1900">
-                <a:solidFill>
-                  <a:srgbClr val="222222"/>
-                </a:solidFill>
-                <a:latin typeface="Calibri"/>
+                <a:spcPts val="600"/>
+              </a:spcAft>
+              <a:defRPr sz="1700">
+                <a:solidFill>
+                  <a:srgbClr val="666666"/>
+                </a:solidFill>
+                <a:latin typeface="Inter"/>
               </a:defRPr>
             </a:pPr>
             <a:r>
@@ -4505,13 +5296,13 @@
           <a:p>
             <a:pPr lvl="1">
               <a:spcAft>
-                <a:spcPts val="800"/>
-              </a:spcAft>
-              <a:defRPr sz="1900">
-                <a:solidFill>
-                  <a:srgbClr val="222222"/>
-                </a:solidFill>
-                <a:latin typeface="Calibri"/>
+                <a:spcPts val="600"/>
+              </a:spcAft>
+              <a:defRPr sz="1700">
+                <a:solidFill>
+                  <a:srgbClr val="666666"/>
+                </a:solidFill>
+                <a:latin typeface="Inter"/>
               </a:defRPr>
             </a:pPr>
             <a:r>
@@ -4521,13 +5312,13 @@
           <a:p>
             <a:pPr lvl="1">
               <a:spcAft>
-                <a:spcPts val="800"/>
-              </a:spcAft>
-              <a:defRPr sz="1900">
-                <a:solidFill>
-                  <a:srgbClr val="222222"/>
-                </a:solidFill>
-                <a:latin typeface="Calibri"/>
+                <a:spcPts val="600"/>
+              </a:spcAft>
+              <a:defRPr sz="1700">
+                <a:solidFill>
+                  <a:srgbClr val="666666"/>
+                </a:solidFill>
+                <a:latin typeface="Inter"/>
               </a:defRPr>
             </a:pPr>
             <a:r>
@@ -4537,17 +5328,53 @@
           <a:p>
             <a:pPr lvl="1">
               <a:spcAft>
-                <a:spcPts val="800"/>
-              </a:spcAft>
-              <a:defRPr sz="1900">
-                <a:solidFill>
-                  <a:srgbClr val="222222"/>
-                </a:solidFill>
-                <a:latin typeface="Calibri"/>
+                <a:spcPts val="600"/>
+              </a:spcAft>
+              <a:defRPr sz="1700">
+                <a:solidFill>
+                  <a:srgbClr val="666666"/>
+                </a:solidFill>
+                <a:latin typeface="Inter"/>
               </a:defRPr>
             </a:pPr>
             <a:r>
               <a:t>6. Final report</a:t>
+            </a:r>
+          </a:p>
+        </p:txBody>
+      </p:sp>
+      <p:sp>
+        <p:nvSpPr>
+          <p:cNvPr id="6" name="TextBox 5"/>
+          <p:cNvSpPr txBox="1"/>
+          <p:nvPr/>
+        </p:nvSpPr>
+        <p:spPr>
+          <a:xfrm>
+            <a:off x="731520" y="6400800"/>
+            <a:ext cx="10058400" cy="365760"/>
+          </a:xfrm>
+          <a:prstGeom prst="rect">
+            <a:avLst/>
+          </a:prstGeom>
+          <a:noFill/>
+        </p:spPr>
+        <p:txBody>
+          <a:bodyPr wrap="square">
+            <a:spAutoFit/>
+          </a:bodyPr>
+          <a:lstStyle/>
+          <a:p>
+            <a:pPr algn="l">
+              <a:defRPr sz="1000" b="0">
+                <a:solidFill>
+                  <a:srgbClr val="999999"/>
+                </a:solidFill>
+                <a:latin typeface="Consolas"/>
+              </a:defRPr>
+            </a:pPr>
+            <a:r>
+              <a:t>© 2026 Martin J. Gallagher  |  GPL-3.0-or-later  |  doehelper.com</a:t>
             </a:r>
           </a:p>
         </p:txBody>
@@ -4566,7 +5393,7 @@
     <p:bg>
       <p:bgPr>
         <a:solidFill>
-          <a:srgbClr val="FFFFFF"/>
+          <a:srgbClr val="FAFAFA"/>
         </a:solidFill>
         <a:effectLst/>
       </p:bgPr>
@@ -4587,13 +5414,13 @@
         <p:spPr>
           <a:xfrm>
             <a:off x="0" y="0"/>
-            <a:ext cx="12191695" cy="54864"/>
+            <a:ext cx="12191695" cy="45720"/>
           </a:xfrm>
           <a:prstGeom prst="rect">
             <a:avLst/>
           </a:prstGeom>
           <a:solidFill>
-            <a:srgbClr val="007BFF"/>
+            <a:srgbClr val="5046E5"/>
           </a:solidFill>
           <a:ln>
             <a:noFill/>
@@ -4623,14 +5450,57 @@
       </p:sp>
       <p:sp>
         <p:nvSpPr>
-          <p:cNvPr id="3" name="TextBox 2"/>
+          <p:cNvPr id="3" name="Rectangle 2"/>
+          <p:cNvSpPr/>
+          <p:nvPr/>
+        </p:nvSpPr>
+        <p:spPr>
+          <a:xfrm>
+            <a:off x="548640" y="411480"/>
+            <a:ext cx="36576" cy="502920"/>
+          </a:xfrm>
+          <a:prstGeom prst="rect">
+            <a:avLst/>
+          </a:prstGeom>
+          <a:solidFill>
+            <a:srgbClr val="5046E5"/>
+          </a:solidFill>
+          <a:ln>
+            <a:noFill/>
+          </a:ln>
+        </p:spPr>
+        <p:style>
+          <a:lnRef idx="1">
+            <a:schemeClr val="accent1"/>
+          </a:lnRef>
+          <a:fillRef idx="3">
+            <a:schemeClr val="accent1"/>
+          </a:fillRef>
+          <a:effectRef idx="2">
+            <a:schemeClr val="accent1"/>
+          </a:effectRef>
+          <a:fontRef idx="minor">
+            <a:schemeClr val="lt1"/>
+          </a:fontRef>
+        </p:style>
+        <p:txBody>
+          <a:bodyPr rtlCol="0" anchor="ctr"/>
+          <a:lstStyle/>
+          <a:p>
+            <a:pPr algn="ctr"/>
+          </a:p>
+        </p:txBody>
+      </p:sp>
+      <p:sp>
+        <p:nvSpPr>
+          <p:cNvPr id="4" name="TextBox 3"/>
           <p:cNvSpPr txBox="1"/>
           <p:nvPr/>
         </p:nvSpPr>
         <p:spPr>
           <a:xfrm>
-            <a:off x="731520" y="365760"/>
-            <a:ext cx="10515600" cy="822960"/>
+            <a:off x="777240" y="365760"/>
+            <a:ext cx="10058400" cy="640080"/>
           </a:xfrm>
           <a:prstGeom prst="rect">
             <a:avLst/>
@@ -4643,30 +5513,116 @@
           </a:bodyPr>
           <a:lstStyle/>
           <a:p>
-            <a:pPr>
-              <a:defRPr sz="3200" b="1">
-                <a:solidFill>
-                  <a:srgbClr val="222222"/>
-                </a:solidFill>
-                <a:latin typeface="Calibri"/>
-              </a:defRPr>
-            </a:pPr>
-            <a:r>
-              <a:t>Option A: Cloud Infrastructure Optimisation</a:t>
-            </a:r>
-          </a:p>
-        </p:txBody>
-      </p:sp>
-      <p:sp>
-        <p:nvSpPr>
-          <p:cNvPr id="4" name="TextBox 3"/>
+            <a:pPr algn="l">
+              <a:defRPr sz="2800" b="1">
+                <a:solidFill>
+                  <a:srgbClr val="111111"/>
+                </a:solidFill>
+                <a:latin typeface="Inter"/>
+              </a:defRPr>
+            </a:pPr>
+            <a:r>
+              <a:t>Option A: Cloud Infrastructure</a:t>
+            </a:r>
+          </a:p>
+        </p:txBody>
+      </p:sp>
+      <p:sp>
+        <p:nvSpPr>
+          <p:cNvPr id="5" name="Rounded Rectangle 4"/>
+          <p:cNvSpPr/>
+          <p:nvPr/>
+        </p:nvSpPr>
+        <p:spPr>
+          <a:xfrm>
+            <a:off x="548640" y="1188720"/>
+            <a:ext cx="5303520" cy="4937760"/>
+          </a:xfrm>
+          <a:prstGeom prst="roundRect">
+            <a:avLst/>
+          </a:prstGeom>
+          <a:solidFill>
+            <a:srgbClr val="F0FDF4"/>
+          </a:solidFill>
+          <a:ln>
+            <a:noFill/>
+          </a:ln>
+        </p:spPr>
+        <p:style>
+          <a:lnRef idx="1">
+            <a:schemeClr val="accent1"/>
+          </a:lnRef>
+          <a:fillRef idx="3">
+            <a:schemeClr val="accent1"/>
+          </a:fillRef>
+          <a:effectRef idx="2">
+            <a:schemeClr val="accent1"/>
+          </a:effectRef>
+          <a:fontRef idx="minor">
+            <a:schemeClr val="lt1"/>
+          </a:fontRef>
+        </p:style>
+        <p:txBody>
+          <a:bodyPr rtlCol="0" anchor="ctr"/>
+          <a:lstStyle/>
+          <a:p>
+            <a:pPr algn="ctr"/>
+          </a:p>
+        </p:txBody>
+      </p:sp>
+      <p:sp>
+        <p:nvSpPr>
+          <p:cNvPr id="6" name="Rectangle 5"/>
+          <p:cNvSpPr/>
+          <p:nvPr/>
+        </p:nvSpPr>
+        <p:spPr>
+          <a:xfrm>
+            <a:off x="548640" y="1188720"/>
+            <a:ext cx="36576" cy="4937760"/>
+          </a:xfrm>
+          <a:prstGeom prst="rect">
+            <a:avLst/>
+          </a:prstGeom>
+          <a:solidFill>
+            <a:srgbClr val="16A34A"/>
+          </a:solidFill>
+          <a:ln>
+            <a:noFill/>
+          </a:ln>
+        </p:spPr>
+        <p:style>
+          <a:lnRef idx="1">
+            <a:schemeClr val="accent1"/>
+          </a:lnRef>
+          <a:fillRef idx="3">
+            <a:schemeClr val="accent1"/>
+          </a:fillRef>
+          <a:effectRef idx="2">
+            <a:schemeClr val="accent1"/>
+          </a:effectRef>
+          <a:fontRef idx="minor">
+            <a:schemeClr val="lt1"/>
+          </a:fontRef>
+        </p:style>
+        <p:txBody>
+          <a:bodyPr rtlCol="0" anchor="ctr"/>
+          <a:lstStyle/>
+          <a:p>
+            <a:pPr algn="ctr"/>
+          </a:p>
+        </p:txBody>
+      </p:sp>
+      <p:sp>
+        <p:nvSpPr>
+          <p:cNvPr id="7" name="TextBox 6"/>
           <p:cNvSpPr txBox="1"/>
           <p:nvPr/>
         </p:nvSpPr>
         <p:spPr>
           <a:xfrm>
-            <a:off x="914400" y="1463040"/>
-            <a:ext cx="10058400" cy="4754880"/>
+            <a:off x="822960" y="1325880"/>
+            <a:ext cx="4754880" cy="365760"/>
           </a:xfrm>
           <a:prstGeom prst="rect">
             <a:avLst/>
@@ -4679,128 +5635,438 @@
           </a:bodyPr>
           <a:lstStyle/>
           <a:p>
+            <a:pPr algn="l">
+              <a:defRPr sz="1600" b="1">
+                <a:solidFill>
+                  <a:srgbClr val="16A34A"/>
+                </a:solidFill>
+                <a:latin typeface="Consolas"/>
+              </a:defRPr>
+            </a:pPr>
+            <a:r>
+              <a:t>FACTORS</a:t>
+            </a:r>
+          </a:p>
+        </p:txBody>
+      </p:sp>
+      <p:sp>
+        <p:nvSpPr>
+          <p:cNvPr id="8" name="TextBox 7"/>
+          <p:cNvSpPr txBox="1"/>
+          <p:nvPr/>
+        </p:nvSpPr>
+        <p:spPr>
+          <a:xfrm>
+            <a:off x="822960" y="1737360"/>
+            <a:ext cx="4754880" cy="4114800"/>
+          </a:xfrm>
+          <a:prstGeom prst="rect">
+            <a:avLst/>
+          </a:prstGeom>
+          <a:noFill/>
+        </p:spPr>
+        <p:txBody>
+          <a:bodyPr wrap="square">
+            <a:spAutoFit/>
+          </a:bodyPr>
+          <a:lstStyle/>
+          <a:p>
             <a:pPr>
               <a:spcAft>
-                <a:spcPts val="800"/>
-              </a:spcAft>
-              <a:defRPr sz="2200" b="0">
-                <a:solidFill>
-                  <a:srgbClr val="222222"/>
-                </a:solidFill>
-                <a:latin typeface="Calibri"/>
-              </a:defRPr>
-            </a:pPr>
-            <a:r>
-              <a:t>Scenario: optimise a Kubernetes-deployed microservice</a:t>
+                <a:spcPts val="500"/>
+              </a:spcAft>
+              <a:defRPr sz="1700">
+                <a:solidFill>
+                  <a:srgbClr val="333333"/>
+                </a:solidFill>
+                <a:latin typeface="Inter"/>
+              </a:defRPr>
+            </a:pPr>
+            <a:r>
+              <a:t>Optimise a Kubernetes microservice</a:t>
             </a:r>
           </a:p>
           <a:p>
             <a:pPr>
               <a:spcAft>
-                <a:spcPts val="800"/>
-              </a:spcAft>
-              <a:defRPr sz="2200" b="0">
-                <a:solidFill>
-                  <a:srgbClr val="222222"/>
-                </a:solidFill>
-                <a:latin typeface="Calibri"/>
-              </a:defRPr>
-            </a:pPr>
-            <a:r>
-              <a:t>10 candidate factors: CPU limit, memory limit, replicas,</a:t>
-            </a:r>
-          </a:p>
-          <a:p>
-            <a:pPr lvl="1">
-              <a:spcAft>
-                <a:spcPts val="800"/>
-              </a:spcAft>
-              <a:defRPr sz="1900">
-                <a:solidFill>
-                  <a:srgbClr val="222222"/>
-                </a:solidFill>
-                <a:latin typeface="Calibri"/>
-              </a:defRPr>
-            </a:pPr>
-            <a:r>
-              <a:t>connection pool, thread count, cache TTL, batch size,</a:t>
-            </a:r>
-          </a:p>
-          <a:p>
-            <a:pPr lvl="1">
-              <a:spcAft>
-                <a:spcPts val="800"/>
-              </a:spcAft>
-              <a:defRPr sz="1900">
-                <a:solidFill>
-                  <a:srgbClr val="222222"/>
-                </a:solidFill>
-                <a:latin typeface="Calibri"/>
-              </a:defRPr>
-            </a:pPr>
-            <a:r>
-              <a:t>retry limit, timeout, log level</a:t>
-            </a:r>
+                <a:spcPts val="500"/>
+              </a:spcAft>
+              <a:defRPr sz="1700">
+                <a:solidFill>
+                  <a:srgbClr val="333333"/>
+                </a:solidFill>
+                <a:latin typeface="Inter"/>
+              </a:defRPr>
+            </a:pPr>
           </a:p>
           <a:p>
             <a:pPr>
               <a:spcAft>
-                <a:spcPts val="800"/>
-              </a:spcAft>
-              <a:defRPr sz="2200" b="0">
-                <a:solidFill>
-                  <a:srgbClr val="222222"/>
-                </a:solidFill>
-                <a:latin typeface="Calibri"/>
-              </a:defRPr>
-            </a:pPr>
-            <a:r>
-              <a:t>3 responses: p99 latency (min), throughput (max), cost (min)</a:t>
+                <a:spcPts val="500"/>
+              </a:spcAft>
+              <a:defRPr sz="1700">
+                <a:solidFill>
+                  <a:srgbClr val="333333"/>
+                </a:solidFill>
+                <a:latin typeface="Inter"/>
+              </a:defRPr>
+            </a:pPr>
+            <a:r>
+              <a:t>10 candidate factors:</a:t>
             </a:r>
           </a:p>
           <a:p>
             <a:pPr>
               <a:spcAft>
-                <a:spcPts val="800"/>
-              </a:spcAft>
-              <a:defRPr sz="2200" b="0">
-                <a:solidFill>
-                  <a:srgbClr val="222222"/>
-                </a:solidFill>
-                <a:latin typeface="Calibri"/>
-              </a:defRPr>
-            </a:pPr>
-            <a:r>
-              <a:t>Budget: 40 total experimental runs</a:t>
+                <a:spcPts val="500"/>
+              </a:spcAft>
+              <a:defRPr sz="1700">
+                <a:solidFill>
+                  <a:srgbClr val="333333"/>
+                </a:solidFill>
+                <a:latin typeface="Inter"/>
+              </a:defRPr>
+            </a:pPr>
+            <a:r>
+              <a:t>CPU limit, memory limit, replicas,</a:t>
             </a:r>
           </a:p>
           <a:p>
             <a:pPr>
               <a:spcAft>
-                <a:spcPts val="800"/>
-              </a:spcAft>
-              <a:defRPr sz="2200" b="0">
-                <a:solidFill>
-                  <a:srgbClr val="222222"/>
-                </a:solidFill>
-                <a:latin typeface="Calibri"/>
-              </a:defRPr>
-            </a:pPr>
+                <a:spcPts val="500"/>
+              </a:spcAft>
+              <a:defRPr sz="1700">
+                <a:solidFill>
+                  <a:srgbClr val="333333"/>
+                </a:solidFill>
+                <a:latin typeface="Inter"/>
+              </a:defRPr>
+            </a:pPr>
+            <a:r>
+              <a:t>connection pool, thread count,</a:t>
+            </a:r>
           </a:p>
           <a:p>
             <a:pPr>
               <a:spcAft>
-                <a:spcPts val="800"/>
-              </a:spcAft>
-              <a:defRPr sz="2200" b="0">
-                <a:solidFill>
-                  <a:srgbClr val="222222"/>
-                </a:solidFill>
-                <a:latin typeface="Calibri"/>
-              </a:defRPr>
-            </a:pPr>
-            <a:r>
-              <a:t>Use doe-helper to design, simulate, analyse, and optimise.</a:t>
+                <a:spcPts val="500"/>
+              </a:spcAft>
+              <a:defRPr sz="1700">
+                <a:solidFill>
+                  <a:srgbClr val="333333"/>
+                </a:solidFill>
+                <a:latin typeface="Inter"/>
+              </a:defRPr>
+            </a:pPr>
+            <a:r>
+              <a:t>cache TTL, batch size, retry limit,</a:t>
+            </a:r>
+          </a:p>
+          <a:p>
+            <a:pPr>
+              <a:spcAft>
+                <a:spcPts val="500"/>
+              </a:spcAft>
+              <a:defRPr sz="1700">
+                <a:solidFill>
+                  <a:srgbClr val="333333"/>
+                </a:solidFill>
+                <a:latin typeface="Inter"/>
+              </a:defRPr>
+            </a:pPr>
+            <a:r>
+              <a:t>timeout, GC interval</a:t>
+            </a:r>
+          </a:p>
+        </p:txBody>
+      </p:sp>
+      <p:sp>
+        <p:nvSpPr>
+          <p:cNvPr id="9" name="Rounded Rectangle 8"/>
+          <p:cNvSpPr/>
+          <p:nvPr/>
+        </p:nvSpPr>
+        <p:spPr>
+          <a:xfrm>
+            <a:off x="6217920" y="1188720"/>
+            <a:ext cx="5303520" cy="4937760"/>
+          </a:xfrm>
+          <a:prstGeom prst="roundRect">
+            <a:avLst/>
+          </a:prstGeom>
+          <a:solidFill>
+            <a:srgbClr val="EEF2FF"/>
+          </a:solidFill>
+          <a:ln>
+            <a:noFill/>
+          </a:ln>
+        </p:spPr>
+        <p:style>
+          <a:lnRef idx="1">
+            <a:schemeClr val="accent1"/>
+          </a:lnRef>
+          <a:fillRef idx="3">
+            <a:schemeClr val="accent1"/>
+          </a:fillRef>
+          <a:effectRef idx="2">
+            <a:schemeClr val="accent1"/>
+          </a:effectRef>
+          <a:fontRef idx="minor">
+            <a:schemeClr val="lt1"/>
+          </a:fontRef>
+        </p:style>
+        <p:txBody>
+          <a:bodyPr rtlCol="0" anchor="ctr"/>
+          <a:lstStyle/>
+          <a:p>
+            <a:pPr algn="ctr"/>
+          </a:p>
+        </p:txBody>
+      </p:sp>
+      <p:sp>
+        <p:nvSpPr>
+          <p:cNvPr id="10" name="Rectangle 9"/>
+          <p:cNvSpPr/>
+          <p:nvPr/>
+        </p:nvSpPr>
+        <p:spPr>
+          <a:xfrm>
+            <a:off x="6217920" y="1188720"/>
+            <a:ext cx="36576" cy="4937760"/>
+          </a:xfrm>
+          <a:prstGeom prst="rect">
+            <a:avLst/>
+          </a:prstGeom>
+          <a:solidFill>
+            <a:srgbClr val="5046E5"/>
+          </a:solidFill>
+          <a:ln>
+            <a:noFill/>
+          </a:ln>
+        </p:spPr>
+        <p:style>
+          <a:lnRef idx="1">
+            <a:schemeClr val="accent1"/>
+          </a:lnRef>
+          <a:fillRef idx="3">
+            <a:schemeClr val="accent1"/>
+          </a:fillRef>
+          <a:effectRef idx="2">
+            <a:schemeClr val="accent1"/>
+          </a:effectRef>
+          <a:fontRef idx="minor">
+            <a:schemeClr val="lt1"/>
+          </a:fontRef>
+        </p:style>
+        <p:txBody>
+          <a:bodyPr rtlCol="0" anchor="ctr"/>
+          <a:lstStyle/>
+          <a:p>
+            <a:pPr algn="ctr"/>
+          </a:p>
+        </p:txBody>
+      </p:sp>
+      <p:sp>
+        <p:nvSpPr>
+          <p:cNvPr id="11" name="TextBox 10"/>
+          <p:cNvSpPr txBox="1"/>
+          <p:nvPr/>
+        </p:nvSpPr>
+        <p:spPr>
+          <a:xfrm>
+            <a:off x="6492240" y="1325880"/>
+            <a:ext cx="4754880" cy="365760"/>
+          </a:xfrm>
+          <a:prstGeom prst="rect">
+            <a:avLst/>
+          </a:prstGeom>
+          <a:noFill/>
+        </p:spPr>
+        <p:txBody>
+          <a:bodyPr wrap="square">
+            <a:spAutoFit/>
+          </a:bodyPr>
+          <a:lstStyle/>
+          <a:p>
+            <a:pPr algn="l">
+              <a:defRPr sz="1600" b="1">
+                <a:solidFill>
+                  <a:srgbClr val="5046E5"/>
+                </a:solidFill>
+                <a:latin typeface="Consolas"/>
+              </a:defRPr>
+            </a:pPr>
+            <a:r>
+              <a:t>OBJECTIVES</a:t>
+            </a:r>
+          </a:p>
+        </p:txBody>
+      </p:sp>
+      <p:sp>
+        <p:nvSpPr>
+          <p:cNvPr id="12" name="TextBox 11"/>
+          <p:cNvSpPr txBox="1"/>
+          <p:nvPr/>
+        </p:nvSpPr>
+        <p:spPr>
+          <a:xfrm>
+            <a:off x="6492240" y="1737360"/>
+            <a:ext cx="4754880" cy="4114800"/>
+          </a:xfrm>
+          <a:prstGeom prst="rect">
+            <a:avLst/>
+          </a:prstGeom>
+          <a:noFill/>
+        </p:spPr>
+        <p:txBody>
+          <a:bodyPr wrap="square">
+            <a:spAutoFit/>
+          </a:bodyPr>
+          <a:lstStyle/>
+          <a:p>
+            <a:pPr>
+              <a:spcAft>
+                <a:spcPts val="500"/>
+              </a:spcAft>
+              <a:defRPr sz="1700">
+                <a:solidFill>
+                  <a:srgbClr val="333333"/>
+                </a:solidFill>
+                <a:latin typeface="Inter"/>
+              </a:defRPr>
+            </a:pPr>
+            <a:r>
+              <a:t>3 responses:</a:t>
+            </a:r>
+          </a:p>
+          <a:p>
+            <a:pPr>
+              <a:spcAft>
+                <a:spcPts val="500"/>
+              </a:spcAft>
+              <a:defRPr sz="1700">
+                <a:solidFill>
+                  <a:srgbClr val="333333"/>
+                </a:solidFill>
+                <a:latin typeface="Inter"/>
+              </a:defRPr>
+            </a:pPr>
+            <a:r>
+              <a:t>p99 latency (minimize)</a:t>
+            </a:r>
+          </a:p>
+          <a:p>
+            <a:pPr>
+              <a:spcAft>
+                <a:spcPts val="500"/>
+              </a:spcAft>
+              <a:defRPr sz="1700">
+                <a:solidFill>
+                  <a:srgbClr val="333333"/>
+                </a:solidFill>
+                <a:latin typeface="Inter"/>
+              </a:defRPr>
+            </a:pPr>
+            <a:r>
+              <a:t>throughput (maximize)</a:t>
+            </a:r>
+          </a:p>
+          <a:p>
+            <a:pPr>
+              <a:spcAft>
+                <a:spcPts val="500"/>
+              </a:spcAft>
+              <a:defRPr sz="1700">
+                <a:solidFill>
+                  <a:srgbClr val="333333"/>
+                </a:solidFill>
+                <a:latin typeface="Inter"/>
+              </a:defRPr>
+            </a:pPr>
+            <a:r>
+              <a:t>cost per hour (minimize)</a:t>
+            </a:r>
+          </a:p>
+          <a:p>
+            <a:pPr>
+              <a:spcAft>
+                <a:spcPts val="500"/>
+              </a:spcAft>
+              <a:defRPr sz="1700">
+                <a:solidFill>
+                  <a:srgbClr val="333333"/>
+                </a:solidFill>
+                <a:latin typeface="Inter"/>
+              </a:defRPr>
+            </a:pPr>
+          </a:p>
+          <a:p>
+            <a:pPr>
+              <a:spcAft>
+                <a:spcPts val="500"/>
+              </a:spcAft>
+              <a:defRPr sz="1700">
+                <a:solidFill>
+                  <a:srgbClr val="333333"/>
+                </a:solidFill>
+                <a:latin typeface="Inter"/>
+              </a:defRPr>
+            </a:pPr>
+            <a:r>
+              <a:t>Budget: 40 total runs</a:t>
+            </a:r>
+          </a:p>
+          <a:p>
+            <a:pPr>
+              <a:spcAft>
+                <a:spcPts val="500"/>
+              </a:spcAft>
+              <a:defRPr sz="1700">
+                <a:solidFill>
+                  <a:srgbClr val="333333"/>
+                </a:solidFill>
+                <a:latin typeface="Inter"/>
+              </a:defRPr>
+            </a:pPr>
+            <a:r>
+              <a:t>across all phases</a:t>
+            </a:r>
+          </a:p>
+        </p:txBody>
+      </p:sp>
+      <p:sp>
+        <p:nvSpPr>
+          <p:cNvPr id="13" name="TextBox 12"/>
+          <p:cNvSpPr txBox="1"/>
+          <p:nvPr/>
+        </p:nvSpPr>
+        <p:spPr>
+          <a:xfrm>
+            <a:off x="731520" y="6400800"/>
+            <a:ext cx="10058400" cy="365760"/>
+          </a:xfrm>
+          <a:prstGeom prst="rect">
+            <a:avLst/>
+          </a:prstGeom>
+          <a:noFill/>
+        </p:spPr>
+        <p:txBody>
+          <a:bodyPr wrap="square">
+            <a:spAutoFit/>
+          </a:bodyPr>
+          <a:lstStyle/>
+          <a:p>
+            <a:pPr algn="l">
+              <a:defRPr sz="1000" b="0">
+                <a:solidFill>
+                  <a:srgbClr val="999999"/>
+                </a:solidFill>
+                <a:latin typeface="Consolas"/>
+              </a:defRPr>
+            </a:pPr>
+            <a:r>
+              <a:t>© 2026 Martin J. Gallagher  |  GPL-3.0-or-later  |  doehelper.com</a:t>
             </a:r>
           </a:p>
         </p:txBody>
@@ -4819,7 +6085,7 @@
     <p:bg>
       <p:bgPr>
         <a:solidFill>
-          <a:srgbClr val="FFFFFF"/>
+          <a:srgbClr val="FAFAFA"/>
         </a:solidFill>
         <a:effectLst/>
       </p:bgPr>
@@ -4840,13 +6106,13 @@
         <p:spPr>
           <a:xfrm>
             <a:off x="0" y="0"/>
-            <a:ext cx="12191695" cy="54864"/>
+            <a:ext cx="12191695" cy="45720"/>
           </a:xfrm>
           <a:prstGeom prst="rect">
             <a:avLst/>
           </a:prstGeom>
           <a:solidFill>
-            <a:srgbClr val="007BFF"/>
+            <a:srgbClr val="5046E5"/>
           </a:solidFill>
           <a:ln>
             <a:noFill/>
@@ -4876,14 +6142,57 @@
       </p:sp>
       <p:sp>
         <p:nvSpPr>
-          <p:cNvPr id="3" name="TextBox 2"/>
+          <p:cNvPr id="3" name="Rectangle 2"/>
+          <p:cNvSpPr/>
+          <p:nvPr/>
+        </p:nvSpPr>
+        <p:spPr>
+          <a:xfrm>
+            <a:off x="548640" y="411480"/>
+            <a:ext cx="36576" cy="502920"/>
+          </a:xfrm>
+          <a:prstGeom prst="rect">
+            <a:avLst/>
+          </a:prstGeom>
+          <a:solidFill>
+            <a:srgbClr val="5046E5"/>
+          </a:solidFill>
+          <a:ln>
+            <a:noFill/>
+          </a:ln>
+        </p:spPr>
+        <p:style>
+          <a:lnRef idx="1">
+            <a:schemeClr val="accent1"/>
+          </a:lnRef>
+          <a:fillRef idx="3">
+            <a:schemeClr val="accent1"/>
+          </a:fillRef>
+          <a:effectRef idx="2">
+            <a:schemeClr val="accent1"/>
+          </a:effectRef>
+          <a:fontRef idx="minor">
+            <a:schemeClr val="lt1"/>
+          </a:fontRef>
+        </p:style>
+        <p:txBody>
+          <a:bodyPr rtlCol="0" anchor="ctr"/>
+          <a:lstStyle/>
+          <a:p>
+            <a:pPr algn="ctr"/>
+          </a:p>
+        </p:txBody>
+      </p:sp>
+      <p:sp>
+        <p:nvSpPr>
+          <p:cNvPr id="4" name="TextBox 3"/>
           <p:cNvSpPr txBox="1"/>
           <p:nvPr/>
         </p:nvSpPr>
         <p:spPr>
           <a:xfrm>
-            <a:off x="731520" y="365760"/>
-            <a:ext cx="10515600" cy="822960"/>
+            <a:off x="777240" y="365760"/>
+            <a:ext cx="10058400" cy="640080"/>
           </a:xfrm>
           <a:prstGeom prst="rect">
             <a:avLst/>
@@ -4896,30 +6205,116 @@
           </a:bodyPr>
           <a:lstStyle/>
           <a:p>
-            <a:pPr>
-              <a:defRPr sz="3200" b="1">
-                <a:solidFill>
-                  <a:srgbClr val="222222"/>
-                </a:solidFill>
-                <a:latin typeface="Calibri"/>
-              </a:defRPr>
-            </a:pPr>
-            <a:r>
-              <a:t>Option B: Manufacturing Process</a:t>
-            </a:r>
-          </a:p>
-        </p:txBody>
-      </p:sp>
-      <p:sp>
-        <p:nvSpPr>
-          <p:cNvPr id="4" name="TextBox 3"/>
+            <a:pPr algn="l">
+              <a:defRPr sz="2800" b="1">
+                <a:solidFill>
+                  <a:srgbClr val="111111"/>
+                </a:solidFill>
+                <a:latin typeface="Inter"/>
+              </a:defRPr>
+            </a:pPr>
+            <a:r>
+              <a:t>Option B: 3D Printing  |  Option C: Bread Baking</a:t>
+            </a:r>
+          </a:p>
+        </p:txBody>
+      </p:sp>
+      <p:sp>
+        <p:nvSpPr>
+          <p:cNvPr id="5" name="Rounded Rectangle 4"/>
+          <p:cNvSpPr/>
+          <p:nvPr/>
+        </p:nvSpPr>
+        <p:spPr>
+          <a:xfrm>
+            <a:off x="548640" y="1188720"/>
+            <a:ext cx="5303520" cy="4937760"/>
+          </a:xfrm>
+          <a:prstGeom prst="roundRect">
+            <a:avLst/>
+          </a:prstGeom>
+          <a:solidFill>
+            <a:srgbClr val="F0FDF4"/>
+          </a:solidFill>
+          <a:ln>
+            <a:noFill/>
+          </a:ln>
+        </p:spPr>
+        <p:style>
+          <a:lnRef idx="1">
+            <a:schemeClr val="accent1"/>
+          </a:lnRef>
+          <a:fillRef idx="3">
+            <a:schemeClr val="accent1"/>
+          </a:fillRef>
+          <a:effectRef idx="2">
+            <a:schemeClr val="accent1"/>
+          </a:effectRef>
+          <a:fontRef idx="minor">
+            <a:schemeClr val="lt1"/>
+          </a:fontRef>
+        </p:style>
+        <p:txBody>
+          <a:bodyPr rtlCol="0" anchor="ctr"/>
+          <a:lstStyle/>
+          <a:p>
+            <a:pPr algn="ctr"/>
+          </a:p>
+        </p:txBody>
+      </p:sp>
+      <p:sp>
+        <p:nvSpPr>
+          <p:cNvPr id="6" name="Rectangle 5"/>
+          <p:cNvSpPr/>
+          <p:nvPr/>
+        </p:nvSpPr>
+        <p:spPr>
+          <a:xfrm>
+            <a:off x="548640" y="1188720"/>
+            <a:ext cx="36576" cy="4937760"/>
+          </a:xfrm>
+          <a:prstGeom prst="rect">
+            <a:avLst/>
+          </a:prstGeom>
+          <a:solidFill>
+            <a:srgbClr val="16A34A"/>
+          </a:solidFill>
+          <a:ln>
+            <a:noFill/>
+          </a:ln>
+        </p:spPr>
+        <p:style>
+          <a:lnRef idx="1">
+            <a:schemeClr val="accent1"/>
+          </a:lnRef>
+          <a:fillRef idx="3">
+            <a:schemeClr val="accent1"/>
+          </a:fillRef>
+          <a:effectRef idx="2">
+            <a:schemeClr val="accent1"/>
+          </a:effectRef>
+          <a:fontRef idx="minor">
+            <a:schemeClr val="lt1"/>
+          </a:fontRef>
+        </p:style>
+        <p:txBody>
+          <a:bodyPr rtlCol="0" anchor="ctr"/>
+          <a:lstStyle/>
+          <a:p>
+            <a:pPr algn="ctr"/>
+          </a:p>
+        </p:txBody>
+      </p:sp>
+      <p:sp>
+        <p:nvSpPr>
+          <p:cNvPr id="7" name="TextBox 6"/>
           <p:cNvSpPr txBox="1"/>
           <p:nvPr/>
         </p:nvSpPr>
         <p:spPr>
           <a:xfrm>
-            <a:off x="914400" y="1463040"/>
-            <a:ext cx="10058400" cy="4754880"/>
+            <a:off x="822960" y="1325880"/>
+            <a:ext cx="4754880" cy="365760"/>
           </a:xfrm>
           <a:prstGeom prst="rect">
             <a:avLst/>
@@ -4932,128 +6327,470 @@
           </a:bodyPr>
           <a:lstStyle/>
           <a:p>
+            <a:pPr algn="l">
+              <a:defRPr sz="1600" b="1">
+                <a:solidFill>
+                  <a:srgbClr val="16A34A"/>
+                </a:solidFill>
+                <a:latin typeface="Consolas"/>
+              </a:defRPr>
+            </a:pPr>
+            <a:r>
+              <a:t>OPTION B</a:t>
+            </a:r>
+          </a:p>
+        </p:txBody>
+      </p:sp>
+      <p:sp>
+        <p:nvSpPr>
+          <p:cNvPr id="8" name="TextBox 7"/>
+          <p:cNvSpPr txBox="1"/>
+          <p:nvPr/>
+        </p:nvSpPr>
+        <p:spPr>
+          <a:xfrm>
+            <a:off x="822960" y="1737360"/>
+            <a:ext cx="4754880" cy="4114800"/>
+          </a:xfrm>
+          <a:prstGeom prst="rect">
+            <a:avLst/>
+          </a:prstGeom>
+          <a:noFill/>
+        </p:spPr>
+        <p:txBody>
+          <a:bodyPr wrap="square">
+            <a:spAutoFit/>
+          </a:bodyPr>
+          <a:lstStyle/>
+          <a:p>
             <a:pPr>
               <a:spcAft>
-                <a:spcPts val="800"/>
-              </a:spcAft>
-              <a:defRPr sz="2200" b="0">
-                <a:solidFill>
-                  <a:srgbClr val="222222"/>
-                </a:solidFill>
-                <a:latin typeface="Calibri"/>
-              </a:defRPr>
-            </a:pPr>
-            <a:r>
-              <a:t>Scenario: optimise 3D printing parameters</a:t>
+                <a:spcPts val="500"/>
+              </a:spcAft>
+              <a:defRPr sz="1700">
+                <a:solidFill>
+                  <a:srgbClr val="333333"/>
+                </a:solidFill>
+                <a:latin typeface="Inter"/>
+              </a:defRPr>
+            </a:pPr>
+            <a:r>
+              <a:t>3D Printing</a:t>
             </a:r>
           </a:p>
           <a:p>
             <a:pPr>
               <a:spcAft>
-                <a:spcPts val="800"/>
-              </a:spcAft>
-              <a:defRPr sz="2200" b="0">
-                <a:solidFill>
-                  <a:srgbClr val="222222"/>
-                </a:solidFill>
-                <a:latin typeface="Calibri"/>
-              </a:defRPr>
-            </a:pPr>
-            <a:r>
-              <a:t>8 candidate factors: layer height, print speed, nozzle temp,</a:t>
-            </a:r>
-          </a:p>
-          <a:p>
-            <a:pPr lvl="1">
-              <a:spcAft>
-                <a:spcPts val="800"/>
-              </a:spcAft>
-              <a:defRPr sz="1900">
-                <a:solidFill>
-                  <a:srgbClr val="222222"/>
-                </a:solidFill>
-                <a:latin typeface="Calibri"/>
-              </a:defRPr>
-            </a:pPr>
-            <a:r>
-              <a:t>bed temp, infill %, infill pattern, retraction distance,</a:t>
-            </a:r>
-          </a:p>
-          <a:p>
-            <a:pPr lvl="1">
-              <a:spcAft>
-                <a:spcPts val="800"/>
-              </a:spcAft>
-              <a:defRPr sz="1900">
-                <a:solidFill>
-                  <a:srgbClr val="222222"/>
-                </a:solidFill>
-                <a:latin typeface="Calibri"/>
-              </a:defRPr>
-            </a:pPr>
-            <a:r>
-              <a:t>cooling fan speed</a:t>
+                <a:spcPts val="500"/>
+              </a:spcAft>
+              <a:defRPr sz="1700">
+                <a:solidFill>
+                  <a:srgbClr val="333333"/>
+                </a:solidFill>
+                <a:latin typeface="Inter"/>
+              </a:defRPr>
+            </a:pPr>
+            <a:r>
+              <a:t>8 factors: layer height, speed,</a:t>
             </a:r>
           </a:p>
           <a:p>
             <a:pPr>
               <a:spcAft>
-                <a:spcPts val="800"/>
-              </a:spcAft>
-              <a:defRPr sz="2200" b="0">
-                <a:solidFill>
-                  <a:srgbClr val="222222"/>
-                </a:solidFill>
-                <a:latin typeface="Calibri"/>
-              </a:defRPr>
-            </a:pPr>
-            <a:r>
-              <a:t>3 responses: tensile strength (max), print time (min), surface quality (max)</a:t>
+                <a:spcPts val="500"/>
+              </a:spcAft>
+              <a:defRPr sz="1700">
+                <a:solidFill>
+                  <a:srgbClr val="333333"/>
+                </a:solidFill>
+                <a:latin typeface="Inter"/>
+              </a:defRPr>
+            </a:pPr>
+            <a:r>
+              <a:t>nozzle temp, bed temp, infill %,</a:t>
             </a:r>
           </a:p>
           <a:p>
             <a:pPr>
               <a:spcAft>
-                <a:spcPts val="800"/>
-              </a:spcAft>
-              <a:defRPr sz="2200" b="0">
-                <a:solidFill>
-                  <a:srgbClr val="222222"/>
-                </a:solidFill>
-                <a:latin typeface="Calibri"/>
-              </a:defRPr>
-            </a:pPr>
-            <a:r>
-              <a:t>Budget: 30 total experimental runs</a:t>
+                <a:spcPts val="500"/>
+              </a:spcAft>
+              <a:defRPr sz="1700">
+                <a:solidFill>
+                  <a:srgbClr val="333333"/>
+                </a:solidFill>
+                <a:latin typeface="Inter"/>
+              </a:defRPr>
+            </a:pPr>
+            <a:r>
+              <a:t>retraction, cooling, wall count</a:t>
             </a:r>
           </a:p>
           <a:p>
             <a:pPr>
               <a:spcAft>
-                <a:spcPts val="800"/>
-              </a:spcAft>
-              <a:defRPr sz="2200" b="0">
-                <a:solidFill>
-                  <a:srgbClr val="222222"/>
-                </a:solidFill>
-                <a:latin typeface="Calibri"/>
+                <a:spcPts val="500"/>
+              </a:spcAft>
+              <a:defRPr sz="1700">
+                <a:solidFill>
+                  <a:srgbClr val="333333"/>
+                </a:solidFill>
+                <a:latin typeface="Inter"/>
               </a:defRPr>
             </a:pPr>
           </a:p>
           <a:p>
             <a:pPr>
               <a:spcAft>
-                <a:spcPts val="800"/>
-              </a:spcAft>
-              <a:defRPr sz="2200" b="0">
-                <a:solidFill>
-                  <a:srgbClr val="222222"/>
-                </a:solidFill>
-                <a:latin typeface="Calibri"/>
-              </a:defRPr>
-            </a:pPr>
-            <a:r>
-              <a:t>Use doe-helper to design, simulate, analyse, and optimise.</a:t>
+                <a:spcPts val="500"/>
+              </a:spcAft>
+              <a:defRPr sz="1700">
+                <a:solidFill>
+                  <a:srgbClr val="333333"/>
+                </a:solidFill>
+                <a:latin typeface="Inter"/>
+              </a:defRPr>
+            </a:pPr>
+            <a:r>
+              <a:t>3 responses: tensile strength (max),</a:t>
+            </a:r>
+          </a:p>
+          <a:p>
+            <a:pPr>
+              <a:spcAft>
+                <a:spcPts val="500"/>
+              </a:spcAft>
+              <a:defRPr sz="1700">
+                <a:solidFill>
+                  <a:srgbClr val="333333"/>
+                </a:solidFill>
+                <a:latin typeface="Inter"/>
+              </a:defRPr>
+            </a:pPr>
+            <a:r>
+              <a:t>print time (min), surface quality (max)</a:t>
+            </a:r>
+          </a:p>
+          <a:p>
+            <a:pPr>
+              <a:spcAft>
+                <a:spcPts val="500"/>
+              </a:spcAft>
+              <a:defRPr sz="1700">
+                <a:solidFill>
+                  <a:srgbClr val="333333"/>
+                </a:solidFill>
+                <a:latin typeface="Inter"/>
+              </a:defRPr>
+            </a:pPr>
+            <a:r>
+              <a:t>Budget: 30 runs</a:t>
+            </a:r>
+          </a:p>
+        </p:txBody>
+      </p:sp>
+      <p:sp>
+        <p:nvSpPr>
+          <p:cNvPr id="9" name="Rounded Rectangle 8"/>
+          <p:cNvSpPr/>
+          <p:nvPr/>
+        </p:nvSpPr>
+        <p:spPr>
+          <a:xfrm>
+            <a:off x="6217920" y="1188720"/>
+            <a:ext cx="5303520" cy="4937760"/>
+          </a:xfrm>
+          <a:prstGeom prst="roundRect">
+            <a:avLst/>
+          </a:prstGeom>
+          <a:solidFill>
+            <a:srgbClr val="EEF2FF"/>
+          </a:solidFill>
+          <a:ln>
+            <a:noFill/>
+          </a:ln>
+        </p:spPr>
+        <p:style>
+          <a:lnRef idx="1">
+            <a:schemeClr val="accent1"/>
+          </a:lnRef>
+          <a:fillRef idx="3">
+            <a:schemeClr val="accent1"/>
+          </a:fillRef>
+          <a:effectRef idx="2">
+            <a:schemeClr val="accent1"/>
+          </a:effectRef>
+          <a:fontRef idx="minor">
+            <a:schemeClr val="lt1"/>
+          </a:fontRef>
+        </p:style>
+        <p:txBody>
+          <a:bodyPr rtlCol="0" anchor="ctr"/>
+          <a:lstStyle/>
+          <a:p>
+            <a:pPr algn="ctr"/>
+          </a:p>
+        </p:txBody>
+      </p:sp>
+      <p:sp>
+        <p:nvSpPr>
+          <p:cNvPr id="10" name="Rectangle 9"/>
+          <p:cNvSpPr/>
+          <p:nvPr/>
+        </p:nvSpPr>
+        <p:spPr>
+          <a:xfrm>
+            <a:off x="6217920" y="1188720"/>
+            <a:ext cx="36576" cy="4937760"/>
+          </a:xfrm>
+          <a:prstGeom prst="rect">
+            <a:avLst/>
+          </a:prstGeom>
+          <a:solidFill>
+            <a:srgbClr val="5046E5"/>
+          </a:solidFill>
+          <a:ln>
+            <a:noFill/>
+          </a:ln>
+        </p:spPr>
+        <p:style>
+          <a:lnRef idx="1">
+            <a:schemeClr val="accent1"/>
+          </a:lnRef>
+          <a:fillRef idx="3">
+            <a:schemeClr val="accent1"/>
+          </a:fillRef>
+          <a:effectRef idx="2">
+            <a:schemeClr val="accent1"/>
+          </a:effectRef>
+          <a:fontRef idx="minor">
+            <a:schemeClr val="lt1"/>
+          </a:fontRef>
+        </p:style>
+        <p:txBody>
+          <a:bodyPr rtlCol="0" anchor="ctr"/>
+          <a:lstStyle/>
+          <a:p>
+            <a:pPr algn="ctr"/>
+          </a:p>
+        </p:txBody>
+      </p:sp>
+      <p:sp>
+        <p:nvSpPr>
+          <p:cNvPr id="11" name="TextBox 10"/>
+          <p:cNvSpPr txBox="1"/>
+          <p:nvPr/>
+        </p:nvSpPr>
+        <p:spPr>
+          <a:xfrm>
+            <a:off x="6492240" y="1325880"/>
+            <a:ext cx="4754880" cy="365760"/>
+          </a:xfrm>
+          <a:prstGeom prst="rect">
+            <a:avLst/>
+          </a:prstGeom>
+          <a:noFill/>
+        </p:spPr>
+        <p:txBody>
+          <a:bodyPr wrap="square">
+            <a:spAutoFit/>
+          </a:bodyPr>
+          <a:lstStyle/>
+          <a:p>
+            <a:pPr algn="l">
+              <a:defRPr sz="1600" b="1">
+                <a:solidFill>
+                  <a:srgbClr val="5046E5"/>
+                </a:solidFill>
+                <a:latin typeface="Consolas"/>
+              </a:defRPr>
+            </a:pPr>
+            <a:r>
+              <a:t>OPTION C</a:t>
+            </a:r>
+          </a:p>
+        </p:txBody>
+      </p:sp>
+      <p:sp>
+        <p:nvSpPr>
+          <p:cNvPr id="12" name="TextBox 11"/>
+          <p:cNvSpPr txBox="1"/>
+          <p:nvPr/>
+        </p:nvSpPr>
+        <p:spPr>
+          <a:xfrm>
+            <a:off x="6492240" y="1737360"/>
+            <a:ext cx="4754880" cy="4114800"/>
+          </a:xfrm>
+          <a:prstGeom prst="rect">
+            <a:avLst/>
+          </a:prstGeom>
+          <a:noFill/>
+        </p:spPr>
+        <p:txBody>
+          <a:bodyPr wrap="square">
+            <a:spAutoFit/>
+          </a:bodyPr>
+          <a:lstStyle/>
+          <a:p>
+            <a:pPr>
+              <a:spcAft>
+                <a:spcPts val="500"/>
+              </a:spcAft>
+              <a:defRPr sz="1700">
+                <a:solidFill>
+                  <a:srgbClr val="333333"/>
+                </a:solidFill>
+                <a:latin typeface="Inter"/>
+              </a:defRPr>
+            </a:pPr>
+            <a:r>
+              <a:t>Bread Baking</a:t>
+            </a:r>
+          </a:p>
+          <a:p>
+            <a:pPr>
+              <a:spcAft>
+                <a:spcPts val="500"/>
+              </a:spcAft>
+              <a:defRPr sz="1700">
+                <a:solidFill>
+                  <a:srgbClr val="333333"/>
+                </a:solidFill>
+                <a:latin typeface="Inter"/>
+              </a:defRPr>
+            </a:pPr>
+            <a:r>
+              <a:t>7 factors: flour protein %, hydration,</a:t>
+            </a:r>
+          </a:p>
+          <a:p>
+            <a:pPr>
+              <a:spcAft>
+                <a:spcPts val="500"/>
+              </a:spcAft>
+              <a:defRPr sz="1700">
+                <a:solidFill>
+                  <a:srgbClr val="333333"/>
+                </a:solidFill>
+                <a:latin typeface="Inter"/>
+              </a:defRPr>
+            </a:pPr>
+            <a:r>
+              <a:t>starter %, salt %, bulk ferment,</a:t>
+            </a:r>
+          </a:p>
+          <a:p>
+            <a:pPr>
+              <a:spcAft>
+                <a:spcPts val="500"/>
+              </a:spcAft>
+              <a:defRPr sz="1700">
+                <a:solidFill>
+                  <a:srgbClr val="333333"/>
+                </a:solidFill>
+                <a:latin typeface="Inter"/>
+              </a:defRPr>
+            </a:pPr>
+            <a:r>
+              <a:t>proof time, oven temperature</a:t>
+            </a:r>
+          </a:p>
+          <a:p>
+            <a:pPr>
+              <a:spcAft>
+                <a:spcPts val="500"/>
+              </a:spcAft>
+              <a:defRPr sz="1700">
+                <a:solidFill>
+                  <a:srgbClr val="333333"/>
+                </a:solidFill>
+                <a:latin typeface="Inter"/>
+              </a:defRPr>
+            </a:pPr>
+          </a:p>
+          <a:p>
+            <a:pPr>
+              <a:spcAft>
+                <a:spcPts val="500"/>
+              </a:spcAft>
+              <a:defRPr sz="1700">
+                <a:solidFill>
+                  <a:srgbClr val="333333"/>
+                </a:solidFill>
+                <a:latin typeface="Inter"/>
+              </a:defRPr>
+            </a:pPr>
+            <a:r>
+              <a:t>3 responses: loaf volume (max),</a:t>
+            </a:r>
+          </a:p>
+          <a:p>
+            <a:pPr>
+              <a:spcAft>
+                <a:spcPts val="500"/>
+              </a:spcAft>
+              <a:defRPr sz="1700">
+                <a:solidFill>
+                  <a:srgbClr val="333333"/>
+                </a:solidFill>
+                <a:latin typeface="Inter"/>
+              </a:defRPr>
+            </a:pPr>
+            <a:r>
+              <a:t>crumb score (max), crust color (target: 4)</a:t>
+            </a:r>
+          </a:p>
+          <a:p>
+            <a:pPr>
+              <a:spcAft>
+                <a:spcPts val="500"/>
+              </a:spcAft>
+              <a:defRPr sz="1700">
+                <a:solidFill>
+                  <a:srgbClr val="333333"/>
+                </a:solidFill>
+                <a:latin typeface="Inter"/>
+              </a:defRPr>
+            </a:pPr>
+            <a:r>
+              <a:t>Budget: 25 runs</a:t>
+            </a:r>
+          </a:p>
+        </p:txBody>
+      </p:sp>
+      <p:sp>
+        <p:nvSpPr>
+          <p:cNvPr id="13" name="TextBox 12"/>
+          <p:cNvSpPr txBox="1"/>
+          <p:nvPr/>
+        </p:nvSpPr>
+        <p:spPr>
+          <a:xfrm>
+            <a:off x="731520" y="6400800"/>
+            <a:ext cx="10058400" cy="365760"/>
+          </a:xfrm>
+          <a:prstGeom prst="rect">
+            <a:avLst/>
+          </a:prstGeom>
+          <a:noFill/>
+        </p:spPr>
+        <p:txBody>
+          <a:bodyPr wrap="square">
+            <a:spAutoFit/>
+          </a:bodyPr>
+          <a:lstStyle/>
+          <a:p>
+            <a:pPr algn="l">
+              <a:defRPr sz="1000" b="0">
+                <a:solidFill>
+                  <a:srgbClr val="999999"/>
+                </a:solidFill>
+                <a:latin typeface="Consolas"/>
+              </a:defRPr>
+            </a:pPr>
+            <a:r>
+              <a:t>© 2026 Martin J. Gallagher  |  GPL-3.0-or-later  |  doehelper.com</a:t>
             </a:r>
           </a:p>
         </p:txBody>
@@ -5072,7 +6809,7 @@
     <p:bg>
       <p:bgPr>
         <a:solidFill>
-          <a:srgbClr val="FFFFFF"/>
+          <a:srgbClr val="FAFAFA"/>
         </a:solidFill>
         <a:effectLst/>
       </p:bgPr>
@@ -5093,13 +6830,13 @@
         <p:spPr>
           <a:xfrm>
             <a:off x="0" y="0"/>
-            <a:ext cx="12191695" cy="54864"/>
+            <a:ext cx="12191695" cy="45720"/>
           </a:xfrm>
           <a:prstGeom prst="rect">
             <a:avLst/>
           </a:prstGeom>
           <a:solidFill>
-            <a:srgbClr val="007BFF"/>
+            <a:srgbClr val="5046E5"/>
           </a:solidFill>
           <a:ln>
             <a:noFill/>
@@ -5129,14 +6866,57 @@
       </p:sp>
       <p:sp>
         <p:nvSpPr>
-          <p:cNvPr id="3" name="TextBox 2"/>
+          <p:cNvPr id="3" name="Rectangle 2"/>
+          <p:cNvSpPr/>
+          <p:nvPr/>
+        </p:nvSpPr>
+        <p:spPr>
+          <a:xfrm>
+            <a:off x="548640" y="411480"/>
+            <a:ext cx="36576" cy="502920"/>
+          </a:xfrm>
+          <a:prstGeom prst="rect">
+            <a:avLst/>
+          </a:prstGeom>
+          <a:solidFill>
+            <a:srgbClr val="5046E5"/>
+          </a:solidFill>
+          <a:ln>
+            <a:noFill/>
+          </a:ln>
+        </p:spPr>
+        <p:style>
+          <a:lnRef idx="1">
+            <a:schemeClr val="accent1"/>
+          </a:lnRef>
+          <a:fillRef idx="3">
+            <a:schemeClr val="accent1"/>
+          </a:fillRef>
+          <a:effectRef idx="2">
+            <a:schemeClr val="accent1"/>
+          </a:effectRef>
+          <a:fontRef idx="minor">
+            <a:schemeClr val="lt1"/>
+          </a:fontRef>
+        </p:style>
+        <p:txBody>
+          <a:bodyPr rtlCol="0" anchor="ctr"/>
+          <a:lstStyle/>
+          <a:p>
+            <a:pPr algn="ctr"/>
+          </a:p>
+        </p:txBody>
+      </p:sp>
+      <p:sp>
+        <p:nvSpPr>
+          <p:cNvPr id="4" name="TextBox 3"/>
           <p:cNvSpPr txBox="1"/>
           <p:nvPr/>
         </p:nvSpPr>
         <p:spPr>
           <a:xfrm>
-            <a:off x="731520" y="365760"/>
-            <a:ext cx="10515600" cy="822960"/>
+            <a:off x="777240" y="365760"/>
+            <a:ext cx="10058400" cy="640080"/>
           </a:xfrm>
           <a:prstGeom prst="rect">
             <a:avLst/>
@@ -5149,30 +6929,30 @@
           </a:bodyPr>
           <a:lstStyle/>
           <a:p>
-            <a:pPr>
-              <a:defRPr sz="3200" b="1">
-                <a:solidFill>
-                  <a:srgbClr val="222222"/>
-                </a:solidFill>
-                <a:latin typeface="Calibri"/>
-              </a:defRPr>
-            </a:pPr>
-            <a:r>
-              <a:t>Option C: Recipe Optimisation</a:t>
-            </a:r>
-          </a:p>
-        </p:txBody>
-      </p:sp>
-      <p:sp>
-        <p:nvSpPr>
-          <p:cNvPr id="4" name="TextBox 3"/>
+            <a:pPr algn="l">
+              <a:defRPr sz="2800" b="1">
+                <a:solidFill>
+                  <a:srgbClr val="111111"/>
+                </a:solidFill>
+                <a:latin typeface="Inter"/>
+              </a:defRPr>
+            </a:pPr>
+            <a:r>
+              <a:t>Capstone Requirements</a:t>
+            </a:r>
+          </a:p>
+        </p:txBody>
+      </p:sp>
+      <p:sp>
+        <p:nvSpPr>
+          <p:cNvPr id="5" name="TextBox 4"/>
           <p:cNvSpPr txBox="1"/>
           <p:nvPr/>
         </p:nvSpPr>
         <p:spPr>
           <a:xfrm>
-            <a:off x="914400" y="1463040"/>
-            <a:ext cx="10058400" cy="4754880"/>
+            <a:off x="822960" y="1188720"/>
+            <a:ext cx="10241280" cy="5120640"/>
           </a:xfrm>
           <a:prstGeom prst="rect">
             <a:avLst/>
@@ -5187,110 +6967,178 @@
           <a:p>
             <a:pPr>
               <a:spcAft>
-                <a:spcPts val="800"/>
-              </a:spcAft>
-              <a:defRPr sz="2200" b="0">
-                <a:solidFill>
-                  <a:srgbClr val="222222"/>
-                </a:solidFill>
-                <a:latin typeface="Calibri"/>
-              </a:defRPr>
-            </a:pPr>
-            <a:r>
-              <a:t>Scenario: optimise a bread baking recipe</a:t>
+                <a:spcPts val="600"/>
+              </a:spcAft>
+              <a:defRPr sz="1900">
+                <a:solidFill>
+                  <a:srgbClr val="333333"/>
+                </a:solidFill>
+                <a:latin typeface="Inter"/>
+              </a:defRPr>
+            </a:pPr>
+            <a:r>
+              <a:t>Phase 1: Screening  (~30 min)</a:t>
+            </a:r>
+          </a:p>
+          <a:p>
+            <a:pPr lvl="1">
+              <a:spcAft>
+                <a:spcPts val="600"/>
+              </a:spcAft>
+              <a:defRPr sz="1700">
+                <a:solidFill>
+                  <a:srgbClr val="666666"/>
+                </a:solidFill>
+                <a:latin typeface="Inter"/>
+              </a:defRPr>
+            </a:pPr>
+            <a:r>
+              <a:t>Choose PB or DSD for all candidate factors</a:t>
+            </a:r>
+          </a:p>
+          <a:p>
+            <a:pPr lvl="1">
+              <a:spcAft>
+                <a:spcPts val="600"/>
+              </a:spcAft>
+              <a:defRPr sz="1700">
+                <a:solidFill>
+                  <a:srgbClr val="666666"/>
+                </a:solidFill>
+                <a:latin typeface="Inter"/>
+              </a:defRPr>
+            </a:pPr>
+            <a:r>
+              <a:t>Identify the 3–4 most important factors</a:t>
+            </a:r>
+          </a:p>
+          <a:p>
+            <a:pPr lvl="1">
+              <a:spcAft>
+                <a:spcPts val="600"/>
+              </a:spcAft>
+              <a:defRPr sz="1700">
+                <a:solidFill>
+                  <a:srgbClr val="666666"/>
+                </a:solidFill>
+                <a:latin typeface="Inter"/>
+              </a:defRPr>
+            </a:pPr>
+            <a:r>
+              <a:t>Document reasoning for dropping factors</a:t>
             </a:r>
           </a:p>
           <a:p>
             <a:pPr>
               <a:spcAft>
-                <a:spcPts val="800"/>
-              </a:spcAft>
-              <a:defRPr sz="2200" b="0">
-                <a:solidFill>
-                  <a:srgbClr val="222222"/>
-                </a:solidFill>
-                <a:latin typeface="Calibri"/>
-              </a:defRPr>
-            </a:pPr>
-            <a:r>
-              <a:t>7 candidate factors: flour protein %, water ratio, yeast amount,</a:t>
+                <a:spcPts val="600"/>
+              </a:spcAft>
+              <a:defRPr sz="1900">
+                <a:solidFill>
+                  <a:srgbClr val="333333"/>
+                </a:solidFill>
+                <a:latin typeface="Inter"/>
+              </a:defRPr>
+            </a:pPr>
+          </a:p>
+          <a:p>
+            <a:pPr>
+              <a:spcAft>
+                <a:spcPts val="600"/>
+              </a:spcAft>
+              <a:defRPr sz="1900">
+                <a:solidFill>
+                  <a:srgbClr val="333333"/>
+                </a:solidFill>
+                <a:latin typeface="Inter"/>
+              </a:defRPr>
+            </a:pPr>
+            <a:r>
+              <a:t>Phase 2: RSM &amp; Optimisation  (~30 min)</a:t>
             </a:r>
           </a:p>
           <a:p>
             <a:pPr lvl="1">
               <a:spcAft>
-                <a:spcPts val="800"/>
-              </a:spcAft>
-              <a:defRPr sz="1900">
-                <a:solidFill>
-                  <a:srgbClr val="222222"/>
-                </a:solidFill>
-                <a:latin typeface="Calibri"/>
-              </a:defRPr>
-            </a:pPr>
-            <a:r>
-              <a:t>salt amount, kneading time, proof time, oven temperature</a:t>
-            </a:r>
-          </a:p>
-          <a:p>
-            <a:pPr>
-              <a:spcAft>
-                <a:spcPts val="800"/>
-              </a:spcAft>
-              <a:defRPr sz="2200" b="0">
-                <a:solidFill>
-                  <a:srgbClr val="222222"/>
-                </a:solidFill>
-                <a:latin typeface="Calibri"/>
-              </a:defRPr>
-            </a:pPr>
-            <a:r>
-              <a:t>3 responses: loaf volume (max), crumb score (max), crust color (target: 4)</a:t>
-            </a:r>
-          </a:p>
-          <a:p>
-            <a:pPr>
-              <a:spcAft>
-                <a:spcPts val="800"/>
-              </a:spcAft>
-              <a:defRPr sz="2200" b="0">
-                <a:solidFill>
-                  <a:srgbClr val="222222"/>
-                </a:solidFill>
-                <a:latin typeface="Calibri"/>
-              </a:defRPr>
-            </a:pPr>
-            <a:r>
-              <a:t>Budget: 25 total experimental runs</a:t>
-            </a:r>
-          </a:p>
-          <a:p>
-            <a:pPr>
-              <a:spcAft>
-                <a:spcPts val="800"/>
-              </a:spcAft>
-              <a:defRPr sz="2200" b="0">
-                <a:solidFill>
-                  <a:srgbClr val="222222"/>
-                </a:solidFill>
-                <a:latin typeface="Calibri"/>
-              </a:defRPr>
-            </a:pPr>
-          </a:p>
-          <a:p>
-            <a:pPr>
-              <a:spcAft>
-                <a:spcPts val="800"/>
-              </a:spcAft>
-              <a:defRPr sz="2200" b="0">
-                <a:solidFill>
-                  <a:srgbClr val="222222"/>
-                </a:solidFill>
-                <a:latin typeface="Calibri"/>
-              </a:defRPr>
-            </a:pPr>
-            <a:r>
-              <a:t>Use doe-helper to design, simulate, analyse, and optimise.</a:t>
+                <a:spcPts val="600"/>
+              </a:spcAft>
+              <a:defRPr sz="1700">
+                <a:solidFill>
+                  <a:srgbClr val="666666"/>
+                </a:solidFill>
+                <a:latin typeface="Inter"/>
+              </a:defRPr>
+            </a:pPr>
+            <a:r>
+              <a:t>Run CCD or Box-Behnken on surviving factors</a:t>
+            </a:r>
+          </a:p>
+          <a:p>
+            <a:pPr lvl="1">
+              <a:spcAft>
+                <a:spcPts val="600"/>
+              </a:spcAft>
+              <a:defRPr sz="1700">
+                <a:solidFill>
+                  <a:srgbClr val="666666"/>
+                </a:solidFill>
+                <a:latin typeface="Inter"/>
+              </a:defRPr>
+            </a:pPr>
+            <a:r>
+              <a:t>Analyse with doe analyze, interpret the surface</a:t>
+            </a:r>
+          </a:p>
+          <a:p>
+            <a:pPr lvl="1">
+              <a:spcAft>
+                <a:spcPts val="600"/>
+              </a:spcAft>
+              <a:defRPr sz="1700">
+                <a:solidFill>
+                  <a:srgbClr val="666666"/>
+                </a:solidFill>
+                <a:latin typeface="Inter"/>
+              </a:defRPr>
+            </a:pPr>
+            <a:r>
+              <a:t>Optimise with doe optimize</a:t>
+            </a:r>
+          </a:p>
+        </p:txBody>
+      </p:sp>
+      <p:sp>
+        <p:nvSpPr>
+          <p:cNvPr id="6" name="TextBox 5"/>
+          <p:cNvSpPr txBox="1"/>
+          <p:nvPr/>
+        </p:nvSpPr>
+        <p:spPr>
+          <a:xfrm>
+            <a:off x="731520" y="6400800"/>
+            <a:ext cx="10058400" cy="365760"/>
+          </a:xfrm>
+          <a:prstGeom prst="rect">
+            <a:avLst/>
+          </a:prstGeom>
+          <a:noFill/>
+        </p:spPr>
+        <p:txBody>
+          <a:bodyPr wrap="square">
+            <a:spAutoFit/>
+          </a:bodyPr>
+          <a:lstStyle/>
+          <a:p>
+            <a:pPr algn="l">
+              <a:defRPr sz="1000" b="0">
+                <a:solidFill>
+                  <a:srgbClr val="999999"/>
+                </a:solidFill>
+                <a:latin typeface="Consolas"/>
+              </a:defRPr>
+            </a:pPr>
+            <a:r>
+              <a:t>© 2026 Martin J. Gallagher  |  GPL-3.0-or-later  |  doehelper.com</a:t>
             </a:r>
           </a:p>
         </p:txBody>
@@ -5309,7 +7157,7 @@
     <p:bg>
       <p:bgPr>
         <a:solidFill>
-          <a:srgbClr val="FFFFFF"/>
+          <a:srgbClr val="FAFAFA"/>
         </a:solidFill>
         <a:effectLst/>
       </p:bgPr>
@@ -5330,13 +7178,13 @@
         <p:spPr>
           <a:xfrm>
             <a:off x="0" y="0"/>
-            <a:ext cx="12191695" cy="54864"/>
+            <a:ext cx="12191695" cy="45720"/>
           </a:xfrm>
           <a:prstGeom prst="rect">
             <a:avLst/>
           </a:prstGeom>
           <a:solidFill>
-            <a:srgbClr val="007BFF"/>
+            <a:srgbClr val="5046E5"/>
           </a:solidFill>
           <a:ln>
             <a:noFill/>
@@ -5366,14 +7214,57 @@
       </p:sp>
       <p:sp>
         <p:nvSpPr>
-          <p:cNvPr id="3" name="TextBox 2"/>
+          <p:cNvPr id="3" name="Rectangle 2"/>
+          <p:cNvSpPr/>
+          <p:nvPr/>
+        </p:nvSpPr>
+        <p:spPr>
+          <a:xfrm>
+            <a:off x="548640" y="411480"/>
+            <a:ext cx="36576" cy="502920"/>
+          </a:xfrm>
+          <a:prstGeom prst="rect">
+            <a:avLst/>
+          </a:prstGeom>
+          <a:solidFill>
+            <a:srgbClr val="5046E5"/>
+          </a:solidFill>
+          <a:ln>
+            <a:noFill/>
+          </a:ln>
+        </p:spPr>
+        <p:style>
+          <a:lnRef idx="1">
+            <a:schemeClr val="accent1"/>
+          </a:lnRef>
+          <a:fillRef idx="3">
+            <a:schemeClr val="accent1"/>
+          </a:fillRef>
+          <a:effectRef idx="2">
+            <a:schemeClr val="accent1"/>
+          </a:effectRef>
+          <a:fontRef idx="minor">
+            <a:schemeClr val="lt1"/>
+          </a:fontRef>
+        </p:style>
+        <p:txBody>
+          <a:bodyPr rtlCol="0" anchor="ctr"/>
+          <a:lstStyle/>
+          <a:p>
+            <a:pPr algn="ctr"/>
+          </a:p>
+        </p:txBody>
+      </p:sp>
+      <p:sp>
+        <p:nvSpPr>
+          <p:cNvPr id="4" name="TextBox 3"/>
           <p:cNvSpPr txBox="1"/>
           <p:nvPr/>
         </p:nvSpPr>
         <p:spPr>
           <a:xfrm>
-            <a:off x="731520" y="365760"/>
-            <a:ext cx="10515600" cy="822960"/>
+            <a:off x="777240" y="365760"/>
+            <a:ext cx="10058400" cy="640080"/>
           </a:xfrm>
           <a:prstGeom prst="rect">
             <a:avLst/>
@@ -5386,30 +7277,30 @@
           </a:bodyPr>
           <a:lstStyle/>
           <a:p>
-            <a:pPr>
-              <a:defRPr sz="3200" b="1">
-                <a:solidFill>
-                  <a:srgbClr val="222222"/>
-                </a:solidFill>
-                <a:latin typeface="Calibri"/>
-              </a:defRPr>
-            </a:pPr>
-            <a:r>
-              <a:t>Capstone Requirements</a:t>
-            </a:r>
-          </a:p>
-        </p:txBody>
-      </p:sp>
-      <p:sp>
-        <p:nvSpPr>
-          <p:cNvPr id="4" name="TextBox 3"/>
+            <a:pPr algn="l">
+              <a:defRPr sz="2800" b="1">
+                <a:solidFill>
+                  <a:srgbClr val="111111"/>
+                </a:solidFill>
+                <a:latin typeface="Inter"/>
+              </a:defRPr>
+            </a:pPr>
+            <a:r>
+              <a:t>Capstone Deliverables</a:t>
+            </a:r>
+          </a:p>
+        </p:txBody>
+      </p:sp>
+      <p:sp>
+        <p:nvSpPr>
+          <p:cNvPr id="5" name="TextBox 4"/>
           <p:cNvSpPr txBox="1"/>
           <p:nvPr/>
         </p:nvSpPr>
         <p:spPr>
           <a:xfrm>
-            <a:off x="914400" y="1463040"/>
-            <a:ext cx="10058400" cy="4754880"/>
+            <a:off x="822960" y="1188720"/>
+            <a:ext cx="10241280" cy="5120640"/>
           </a:xfrm>
           <a:prstGeom prst="rect">
             <a:avLst/>
@@ -5424,142 +7315,165 @@
           <a:p>
             <a:pPr>
               <a:spcAft>
-                <a:spcPts val="800"/>
-              </a:spcAft>
-              <a:defRPr sz="2200" b="0">
-                <a:solidFill>
-                  <a:srgbClr val="222222"/>
-                </a:solidFill>
-                <a:latin typeface="Calibri"/>
-              </a:defRPr>
-            </a:pPr>
-            <a:r>
-              <a:t>Phase 1: Screening (doe init, doe generate, doe analyze)</a:t>
+                <a:spcPts val="600"/>
+              </a:spcAft>
+              <a:defRPr sz="1900">
+                <a:solidFill>
+                  <a:srgbClr val="333333"/>
+                </a:solidFill>
+                <a:latin typeface="Inter"/>
+              </a:defRPr>
+            </a:pPr>
+            <a:r>
+              <a:t>1. config.json files for screening and RSM phases</a:t>
+            </a:r>
+          </a:p>
+          <a:p>
+            <a:pPr>
+              <a:spcAft>
+                <a:spcPts val="600"/>
+              </a:spcAft>
+              <a:defRPr sz="1900">
+                <a:solidFill>
+                  <a:srgbClr val="333333"/>
+                </a:solidFill>
+                <a:latin typeface="Inter"/>
+              </a:defRPr>
+            </a:pPr>
+            <a:r>
+              <a:t>2. doe report HTML output for each phase</a:t>
+            </a:r>
+          </a:p>
+          <a:p>
+            <a:pPr>
+              <a:spcAft>
+                <a:spcPts val="600"/>
+              </a:spcAft>
+              <a:defRPr sz="1900">
+                <a:solidFill>
+                  <a:srgbClr val="333333"/>
+                </a:solidFill>
+                <a:latin typeface="Inter"/>
+              </a:defRPr>
+            </a:pPr>
+            <a:r>
+              <a:t>3. Summary document (1–2 pages):</a:t>
             </a:r>
           </a:p>
           <a:p>
             <a:pPr lvl="1">
               <a:spcAft>
-                <a:spcPts val="800"/>
+                <a:spcPts val="600"/>
+              </a:spcAft>
+              <a:defRPr sz="1700">
+                <a:solidFill>
+                  <a:srgbClr val="666666"/>
+                </a:solidFill>
+                <a:latin typeface="Inter"/>
+              </a:defRPr>
+            </a:pPr>
+            <a:r>
+              <a:t>Problem statement and factor selection rationale</a:t>
+            </a:r>
+          </a:p>
+          <a:p>
+            <a:pPr lvl="1">
+              <a:spcAft>
+                <a:spcPts val="600"/>
+              </a:spcAft>
+              <a:defRPr sz="1700">
+                <a:solidFill>
+                  <a:srgbClr val="666666"/>
+                </a:solidFill>
+                <a:latin typeface="Inter"/>
+              </a:defRPr>
+            </a:pPr>
+            <a:r>
+              <a:t>Screening results and factor elimination decisions</a:t>
+            </a:r>
+          </a:p>
+          <a:p>
+            <a:pPr lvl="1">
+              <a:spcAft>
+                <a:spcPts val="600"/>
+              </a:spcAft>
+              <a:defRPr sz="1700">
+                <a:solidFill>
+                  <a:srgbClr val="666666"/>
+                </a:solidFill>
+                <a:latin typeface="Inter"/>
+              </a:defRPr>
+            </a:pPr>
+            <a:r>
+              <a:t>RSM analysis and optimal settings</a:t>
+            </a:r>
+          </a:p>
+          <a:p>
+            <a:pPr lvl="1">
+              <a:spcAft>
+                <a:spcPts val="600"/>
+              </a:spcAft>
+              <a:defRPr sz="1700">
+                <a:solidFill>
+                  <a:srgbClr val="666666"/>
+                </a:solidFill>
+                <a:latin typeface="Inter"/>
+              </a:defRPr>
+            </a:pPr>
+            <a:r>
+              <a:t>Practical recommendations</a:t>
+            </a:r>
+          </a:p>
+          <a:p>
+            <a:pPr>
+              <a:spcAft>
+                <a:spcPts val="600"/>
               </a:spcAft>
               <a:defRPr sz="1900">
                 <a:solidFill>
-                  <a:srgbClr val="222222"/>
-                </a:solidFill>
-                <a:latin typeface="Calibri"/>
-              </a:defRPr>
-            </a:pPr>
-            <a:r>
-              <a:t>Choose an appropriate screening design for all factors</a:t>
-            </a:r>
-          </a:p>
-          <a:p>
-            <a:pPr lvl="1">
-              <a:spcAft>
-                <a:spcPts val="800"/>
-              </a:spcAft>
-              <a:defRPr sz="1900">
-                <a:solidFill>
-                  <a:srgbClr val="222222"/>
-                </a:solidFill>
-                <a:latin typeface="Calibri"/>
-              </a:defRPr>
-            </a:pPr>
-            <a:r>
-              <a:t>Identify the 3-4 most important factors</a:t>
-            </a:r>
-          </a:p>
-          <a:p>
-            <a:pPr lvl="1">
-              <a:spcAft>
-                <a:spcPts val="800"/>
-              </a:spcAft>
-              <a:defRPr sz="1900">
-                <a:solidFill>
-                  <a:srgbClr val="222222"/>
-                </a:solidFill>
-                <a:latin typeface="Calibri"/>
-              </a:defRPr>
-            </a:pPr>
-            <a:r>
-              <a:t>Document your reasoning for dropping factors</a:t>
-            </a:r>
-          </a:p>
-          <a:p>
-            <a:pPr>
-              <a:spcAft>
-                <a:spcPts val="800"/>
-              </a:spcAft>
-              <a:defRPr sz="2200" b="0">
-                <a:solidFill>
-                  <a:srgbClr val="222222"/>
-                </a:solidFill>
-                <a:latin typeface="Calibri"/>
-              </a:defRPr>
-            </a:pPr>
-          </a:p>
-          <a:p>
-            <a:pPr>
-              <a:spcAft>
-                <a:spcPts val="800"/>
-              </a:spcAft>
-              <a:defRPr sz="2200" b="0">
-                <a:solidFill>
-                  <a:srgbClr val="222222"/>
-                </a:solidFill>
-                <a:latin typeface="Calibri"/>
-              </a:defRPr>
-            </a:pPr>
-            <a:r>
-              <a:t>Phase 2: Characterisation &amp; Optimisation</a:t>
-            </a:r>
-          </a:p>
-          <a:p>
-            <a:pPr lvl="1">
-              <a:spcAft>
-                <a:spcPts val="800"/>
-              </a:spcAft>
-              <a:defRPr sz="1900">
-                <a:solidFill>
-                  <a:srgbClr val="222222"/>
-                </a:solidFill>
-                <a:latin typeface="Calibri"/>
-              </a:defRPr>
-            </a:pPr>
-            <a:r>
-              <a:t>Run a CCD or Box-Behnken on surviving factors</a:t>
-            </a:r>
-          </a:p>
-          <a:p>
-            <a:pPr lvl="1">
-              <a:spcAft>
-                <a:spcPts val="800"/>
-              </a:spcAft>
-              <a:defRPr sz="1900">
-                <a:solidFill>
-                  <a:srgbClr val="222222"/>
-                </a:solidFill>
-                <a:latin typeface="Calibri"/>
-              </a:defRPr>
-            </a:pPr>
-            <a:r>
-              <a:t>Analyse with doe analyze, interpret the response surface</a:t>
-            </a:r>
-          </a:p>
-          <a:p>
-            <a:pPr lvl="1">
-              <a:spcAft>
-                <a:spcPts val="800"/>
-              </a:spcAft>
-              <a:defRPr sz="1900">
-                <a:solidFill>
-                  <a:srgbClr val="222222"/>
-                </a:solidFill>
-                <a:latin typeface="Calibri"/>
-              </a:defRPr>
-            </a:pPr>
-            <a:r>
-              <a:t>Optimise with doe optimize</a:t>
+                  <a:srgbClr val="333333"/>
+                </a:solidFill>
+                <a:latin typeface="Inter"/>
+              </a:defRPr>
+            </a:pPr>
+            <a:r>
+              <a:t>4. Brief presentation (5 minutes) to the class</a:t>
+            </a:r>
+          </a:p>
+        </p:txBody>
+      </p:sp>
+      <p:sp>
+        <p:nvSpPr>
+          <p:cNvPr id="6" name="TextBox 5"/>
+          <p:cNvSpPr txBox="1"/>
+          <p:nvPr/>
+        </p:nvSpPr>
+        <p:spPr>
+          <a:xfrm>
+            <a:off x="731520" y="6400800"/>
+            <a:ext cx="10058400" cy="365760"/>
+          </a:xfrm>
+          <a:prstGeom prst="rect">
+            <a:avLst/>
+          </a:prstGeom>
+          <a:noFill/>
+        </p:spPr>
+        <p:txBody>
+          <a:bodyPr wrap="square">
+            <a:spAutoFit/>
+          </a:bodyPr>
+          <a:lstStyle/>
+          <a:p>
+            <a:pPr algn="l">
+              <a:defRPr sz="1000" b="0">
+                <a:solidFill>
+                  <a:srgbClr val="999999"/>
+                </a:solidFill>
+                <a:latin typeface="Consolas"/>
+              </a:defRPr>
+            </a:pPr>
+            <a:r>
+              <a:t>© 2026 Martin J. Gallagher  |  GPL-3.0-or-later  |  doehelper.com</a:t>
             </a:r>
           </a:p>
         </p:txBody>
@@ -5578,7 +7492,7 @@
     <p:bg>
       <p:bgPr>
         <a:solidFill>
-          <a:srgbClr val="FFFFFF"/>
+          <a:srgbClr val="FAFAFA"/>
         </a:solidFill>
         <a:effectLst/>
       </p:bgPr>
@@ -5599,13 +7513,13 @@
         <p:spPr>
           <a:xfrm>
             <a:off x="0" y="0"/>
-            <a:ext cx="12191695" cy="54864"/>
+            <a:ext cx="12191695" cy="45720"/>
           </a:xfrm>
           <a:prstGeom prst="rect">
             <a:avLst/>
           </a:prstGeom>
           <a:solidFill>
-            <a:srgbClr val="007BFF"/>
+            <a:srgbClr val="0D9488"/>
           </a:solidFill>
           <a:ln>
             <a:noFill/>
@@ -5641,8 +7555,8 @@
         </p:nvSpPr>
         <p:spPr>
           <a:xfrm>
-            <a:off x="731520" y="365760"/>
-            <a:ext cx="10515600" cy="822960"/>
+            <a:off x="777240" y="320040"/>
+            <a:ext cx="10058400" cy="548640"/>
           </a:xfrm>
           <a:prstGeom prst="rect">
             <a:avLst/>
@@ -5655,30 +7569,335 @@
           </a:bodyPr>
           <a:lstStyle/>
           <a:p>
+            <a:pPr algn="l">
+              <a:defRPr sz="2600" b="1">
+                <a:solidFill>
+                  <a:srgbClr val="111111"/>
+                </a:solidFill>
+                <a:latin typeface="Inter"/>
+              </a:defRPr>
+            </a:pPr>
+            <a:r>
+              <a:t>Capstone Workflow with doe-helper</a:t>
+            </a:r>
+          </a:p>
+        </p:txBody>
+      </p:sp>
+      <p:sp>
+        <p:nvSpPr>
+          <p:cNvPr id="4" name="Rectangle 3"/>
+          <p:cNvSpPr/>
+          <p:nvPr/>
+        </p:nvSpPr>
+        <p:spPr>
+          <a:xfrm>
+            <a:off x="548640" y="1051560"/>
+            <a:ext cx="10972800" cy="320040"/>
+          </a:xfrm>
+          <a:prstGeom prst="rect">
+            <a:avLst/>
+          </a:prstGeom>
+          <a:solidFill>
+            <a:srgbClr val="222222"/>
+          </a:solidFill>
+          <a:ln>
+            <a:noFill/>
+          </a:ln>
+        </p:spPr>
+        <p:style>
+          <a:lnRef idx="1">
+            <a:schemeClr val="accent1"/>
+          </a:lnRef>
+          <a:fillRef idx="3">
+            <a:schemeClr val="accent1"/>
+          </a:fillRef>
+          <a:effectRef idx="2">
+            <a:schemeClr val="accent1"/>
+          </a:effectRef>
+          <a:fontRef idx="minor">
+            <a:schemeClr val="lt1"/>
+          </a:fontRef>
+        </p:style>
+        <p:txBody>
+          <a:bodyPr rtlCol="0" anchor="ctr"/>
+          <a:lstStyle/>
+          <a:p>
+            <a:pPr algn="ctr"/>
+          </a:p>
+        </p:txBody>
+      </p:sp>
+      <p:sp>
+        <p:nvSpPr>
+          <p:cNvPr id="5" name="TextBox 4"/>
+          <p:cNvSpPr txBox="1"/>
+          <p:nvPr/>
+        </p:nvSpPr>
+        <p:spPr>
+          <a:xfrm>
+            <a:off x="822960" y="1051560"/>
+            <a:ext cx="3657600" cy="320040"/>
+          </a:xfrm>
+          <a:prstGeom prst="rect">
+            <a:avLst/>
+          </a:prstGeom>
+          <a:noFill/>
+        </p:spPr>
+        <p:txBody>
+          <a:bodyPr wrap="square" anchor="ctr">
+            <a:spAutoFit/>
+          </a:bodyPr>
+          <a:lstStyle/>
+          <a:p>
+            <a:pPr algn="l">
+              <a:defRPr sz="1000" b="0">
+                <a:solidFill>
+                  <a:srgbClr val="999999"/>
+                </a:solidFill>
+                <a:latin typeface="Consolas"/>
+              </a:defRPr>
+            </a:pPr>
+            <a:r>
+              <a:t>terminal</a:t>
+            </a:r>
+          </a:p>
+        </p:txBody>
+      </p:sp>
+      <p:sp>
+        <p:nvSpPr>
+          <p:cNvPr id="6" name="Rounded Rectangle 5"/>
+          <p:cNvSpPr/>
+          <p:nvPr/>
+        </p:nvSpPr>
+        <p:spPr>
+          <a:xfrm>
+            <a:off x="548640" y="1371600"/>
+            <a:ext cx="10972800" cy="4389120"/>
+          </a:xfrm>
+          <a:prstGeom prst="roundRect">
+            <a:avLst/>
+          </a:prstGeom>
+          <a:solidFill>
+            <a:srgbClr val="1A1A1A"/>
+          </a:solidFill>
+          <a:ln>
+            <a:noFill/>
+          </a:ln>
+        </p:spPr>
+        <p:style>
+          <a:lnRef idx="1">
+            <a:schemeClr val="accent1"/>
+          </a:lnRef>
+          <a:fillRef idx="3">
+            <a:schemeClr val="accent1"/>
+          </a:fillRef>
+          <a:effectRef idx="2">
+            <a:schemeClr val="accent1"/>
+          </a:effectRef>
+          <a:fontRef idx="minor">
+            <a:schemeClr val="lt1"/>
+          </a:fontRef>
+        </p:style>
+        <p:txBody>
+          <a:bodyPr rtlCol="0" anchor="ctr" wrap="square" lIns="274320" tIns="182880" rIns="274320"/>
+          <a:lstStyle/>
+          <a:p>
+            <a:pPr algn="ctr">
+              <a:spcAft>
+                <a:spcPts val="100"/>
+              </a:spcAft>
+              <a:defRPr sz="1500">
+                <a:solidFill>
+                  <a:srgbClr val="555555"/>
+                </a:solidFill>
+                <a:latin typeface="Consolas"/>
+              </a:defRPr>
+            </a:pPr>
+            <a:r>
+              <a:t># Phase 1: Screening</a:t>
+            </a:r>
+          </a:p>
+          <a:p>
             <a:pPr>
-              <a:defRPr sz="3200" b="1">
-                <a:solidFill>
-                  <a:srgbClr val="222222"/>
-                </a:solidFill>
-                <a:latin typeface="Calibri"/>
-              </a:defRPr>
-            </a:pPr>
-            <a:r>
-              <a:t>Capstone Deliverables</a:t>
-            </a:r>
-          </a:p>
-        </p:txBody>
-      </p:sp>
-      <p:sp>
-        <p:nvSpPr>
-          <p:cNvPr id="4" name="TextBox 3"/>
+              <a:spcAft>
+                <a:spcPts val="100"/>
+              </a:spcAft>
+              <a:defRPr sz="1500">
+                <a:solidFill>
+                  <a:srgbClr val="6EC86E"/>
+                </a:solidFill>
+                <a:latin typeface="Consolas"/>
+              </a:defRPr>
+            </a:pPr>
+            <a:r>
+              <a:t>$ doe init project/ --design plackett_burman</a:t>
+            </a:r>
+          </a:p>
+          <a:p>
+            <a:pPr>
+              <a:spcAft>
+                <a:spcPts val="100"/>
+              </a:spcAft>
+              <a:defRPr sz="1500">
+                <a:solidFill>
+                  <a:srgbClr val="6EC86E"/>
+                </a:solidFill>
+                <a:latin typeface="Consolas"/>
+              </a:defRPr>
+            </a:pPr>
+            <a:r>
+              <a:t>$ doe generate project/ &amp;&amp; bash project/run.sh</a:t>
+            </a:r>
+          </a:p>
+          <a:p>
+            <a:pPr>
+              <a:spcAft>
+                <a:spcPts val="100"/>
+              </a:spcAft>
+              <a:defRPr sz="1500">
+                <a:solidFill>
+                  <a:srgbClr val="6EC86E"/>
+                </a:solidFill>
+                <a:latin typeface="Consolas"/>
+              </a:defRPr>
+            </a:pPr>
+            <a:r>
+              <a:t>$ doe analyze project/</a:t>
+            </a:r>
+          </a:p>
+          <a:p>
+            <a:pPr>
+              <a:spcAft>
+                <a:spcPts val="100"/>
+              </a:spcAft>
+              <a:defRPr sz="1500">
+                <a:solidFill>
+                  <a:srgbClr val="CCCCCC"/>
+                </a:solidFill>
+                <a:latin typeface="Consolas"/>
+              </a:defRPr>
+            </a:pPr>
+          </a:p>
+          <a:p>
+            <a:pPr>
+              <a:spcAft>
+                <a:spcPts val="100"/>
+              </a:spcAft>
+              <a:defRPr sz="1500">
+                <a:solidFill>
+                  <a:srgbClr val="555555"/>
+                </a:solidFill>
+                <a:latin typeface="Consolas"/>
+              </a:defRPr>
+            </a:pPr>
+            <a:r>
+              <a:t># Phase 2: RSM (with reduced factors)</a:t>
+            </a:r>
+          </a:p>
+          <a:p>
+            <a:pPr>
+              <a:spcAft>
+                <a:spcPts val="100"/>
+              </a:spcAft>
+              <a:defRPr sz="1500">
+                <a:solidFill>
+                  <a:srgbClr val="6EC86E"/>
+                </a:solidFill>
+                <a:latin typeface="Consolas"/>
+              </a:defRPr>
+            </a:pPr>
+            <a:r>
+              <a:t>$ doe generate project_rsm/ &amp;&amp; bash project_rsm/run.sh</a:t>
+            </a:r>
+          </a:p>
+          <a:p>
+            <a:pPr>
+              <a:spcAft>
+                <a:spcPts val="100"/>
+              </a:spcAft>
+              <a:defRPr sz="1500">
+                <a:solidFill>
+                  <a:srgbClr val="6EC86E"/>
+                </a:solidFill>
+                <a:latin typeface="Consolas"/>
+              </a:defRPr>
+            </a:pPr>
+            <a:r>
+              <a:t>$ doe analyze project_rsm/</a:t>
+            </a:r>
+          </a:p>
+          <a:p>
+            <a:pPr>
+              <a:spcAft>
+                <a:spcPts val="100"/>
+              </a:spcAft>
+              <a:defRPr sz="1500">
+                <a:solidFill>
+                  <a:srgbClr val="CCCCCC"/>
+                </a:solidFill>
+                <a:latin typeface="Consolas"/>
+              </a:defRPr>
+            </a:pPr>
+          </a:p>
+          <a:p>
+            <a:pPr>
+              <a:spcAft>
+                <a:spcPts val="100"/>
+              </a:spcAft>
+              <a:defRPr sz="1500">
+                <a:solidFill>
+                  <a:srgbClr val="555555"/>
+                </a:solidFill>
+                <a:latin typeface="Consolas"/>
+              </a:defRPr>
+            </a:pPr>
+            <a:r>
+              <a:t># Phase 3: Optimise &amp; Report</a:t>
+            </a:r>
+          </a:p>
+          <a:p>
+            <a:pPr>
+              <a:spcAft>
+                <a:spcPts val="100"/>
+              </a:spcAft>
+              <a:defRPr sz="1500">
+                <a:solidFill>
+                  <a:srgbClr val="6EC86E"/>
+                </a:solidFill>
+                <a:latin typeface="Consolas"/>
+              </a:defRPr>
+            </a:pPr>
+            <a:r>
+              <a:t>$ doe optimize project_rsm/</a:t>
+            </a:r>
+          </a:p>
+          <a:p>
+            <a:pPr>
+              <a:spcAft>
+                <a:spcPts val="100"/>
+              </a:spcAft>
+              <a:defRPr sz="1500">
+                <a:solidFill>
+                  <a:srgbClr val="6EC86E"/>
+                </a:solidFill>
+                <a:latin typeface="Consolas"/>
+              </a:defRPr>
+            </a:pPr>
+            <a:r>
+              <a:t>$ doe report project_rsm/</a:t>
+            </a:r>
+          </a:p>
+        </p:txBody>
+      </p:sp>
+      <p:sp>
+        <p:nvSpPr>
+          <p:cNvPr id="7" name="TextBox 6"/>
           <p:cNvSpPr txBox="1"/>
           <p:nvPr/>
         </p:nvSpPr>
         <p:spPr>
           <a:xfrm>
-            <a:off x="914400" y="1463040"/>
-            <a:ext cx="10058400" cy="4754880"/>
+            <a:off x="731520" y="6400800"/>
+            <a:ext cx="10058400" cy="365760"/>
           </a:xfrm>
           <a:prstGeom prst="rect">
             <a:avLst/>
@@ -5691,131 +7910,16 @@
           </a:bodyPr>
           <a:lstStyle/>
           <a:p>
-            <a:pPr>
-              <a:spcAft>
-                <a:spcPts val="800"/>
-              </a:spcAft>
-              <a:defRPr sz="2200" b="0">
-                <a:solidFill>
-                  <a:srgbClr val="222222"/>
-                </a:solidFill>
-                <a:latin typeface="Calibri"/>
-              </a:defRPr>
-            </a:pPr>
-            <a:r>
-              <a:t>1. Completed config.json files for each phase</a:t>
-            </a:r>
-          </a:p>
-          <a:p>
-            <a:pPr>
-              <a:spcAft>
-                <a:spcPts val="800"/>
-              </a:spcAft>
-              <a:defRPr sz="2200" b="0">
-                <a:solidFill>
-                  <a:srgbClr val="222222"/>
-                </a:solidFill>
-                <a:latin typeface="Calibri"/>
-              </a:defRPr>
-            </a:pPr>
-            <a:r>
-              <a:t>2. doe report HTML output for screening and RSM phases</a:t>
-            </a:r>
-          </a:p>
-          <a:p>
-            <a:pPr>
-              <a:spcAft>
-                <a:spcPts val="800"/>
-              </a:spcAft>
-              <a:defRPr sz="2200" b="0">
-                <a:solidFill>
-                  <a:srgbClr val="222222"/>
-                </a:solidFill>
-                <a:latin typeface="Calibri"/>
-              </a:defRPr>
-            </a:pPr>
-            <a:r>
-              <a:t>3. Summary document (1-2 pages) covering:</a:t>
-            </a:r>
-          </a:p>
-          <a:p>
-            <a:pPr lvl="1">
-              <a:spcAft>
-                <a:spcPts val="800"/>
-              </a:spcAft>
-              <a:defRPr sz="1900">
-                <a:solidFill>
-                  <a:srgbClr val="222222"/>
-                </a:solidFill>
-                <a:latin typeface="Calibri"/>
-              </a:defRPr>
-            </a:pPr>
-            <a:r>
-              <a:t>Problem statement and factor selection rationale</a:t>
-            </a:r>
-          </a:p>
-          <a:p>
-            <a:pPr lvl="1">
-              <a:spcAft>
-                <a:spcPts val="800"/>
-              </a:spcAft>
-              <a:defRPr sz="1900">
-                <a:solidFill>
-                  <a:srgbClr val="222222"/>
-                </a:solidFill>
-                <a:latin typeface="Calibri"/>
-              </a:defRPr>
-            </a:pPr>
-            <a:r>
-              <a:t>Screening results and factor elimination decisions</a:t>
-            </a:r>
-          </a:p>
-          <a:p>
-            <a:pPr lvl="1">
-              <a:spcAft>
-                <a:spcPts val="800"/>
-              </a:spcAft>
-              <a:defRPr sz="1900">
-                <a:solidFill>
-                  <a:srgbClr val="222222"/>
-                </a:solidFill>
-                <a:latin typeface="Calibri"/>
-              </a:defRPr>
-            </a:pPr>
-            <a:r>
-              <a:t>RSM analysis and optimal settings</a:t>
-            </a:r>
-          </a:p>
-          <a:p>
-            <a:pPr lvl="1">
-              <a:spcAft>
-                <a:spcPts val="800"/>
-              </a:spcAft>
-              <a:defRPr sz="1900">
-                <a:solidFill>
-                  <a:srgbClr val="222222"/>
-                </a:solidFill>
-                <a:latin typeface="Calibri"/>
-              </a:defRPr>
-            </a:pPr>
-            <a:r>
-              <a:t>Practical recommendations</a:t>
-            </a:r>
-          </a:p>
-          <a:p>
-            <a:pPr>
-              <a:spcAft>
-                <a:spcPts val="800"/>
-              </a:spcAft>
-              <a:defRPr sz="2200" b="0">
-                <a:solidFill>
-                  <a:srgbClr val="222222"/>
-                </a:solidFill>
-                <a:latin typeface="Calibri"/>
-              </a:defRPr>
-            </a:pPr>
-            <a:r>
-              <a:t>4. Brief presentation (5 minutes) to the class</a:t>
+            <a:pPr algn="l">
+              <a:defRPr sz="1000" b="0">
+                <a:solidFill>
+                  <a:srgbClr val="999999"/>
+                </a:solidFill>
+                <a:latin typeface="Consolas"/>
+              </a:defRPr>
+            </a:pPr>
+            <a:r>
+              <a:t>© 2026 Martin J. Gallagher  |  GPL-3.0-or-later  |  doehelper.com</a:t>
             </a:r>
           </a:p>
         </p:txBody>
@@ -5834,7 +7938,7 @@
     <p:bg>
       <p:bgPr>
         <a:solidFill>
-          <a:srgbClr val="FFFFFF"/>
+          <a:srgbClr val="FAFAFA"/>
         </a:solidFill>
         <a:effectLst/>
       </p:bgPr>
@@ -5855,13 +7959,13 @@
         <p:spPr>
           <a:xfrm>
             <a:off x="0" y="0"/>
-            <a:ext cx="12191695" cy="54864"/>
+            <a:ext cx="12191695" cy="45720"/>
           </a:xfrm>
           <a:prstGeom prst="rect">
             <a:avLst/>
           </a:prstGeom>
           <a:solidFill>
-            <a:srgbClr val="007BFF"/>
+            <a:srgbClr val="D97706"/>
           </a:solidFill>
           <a:ln>
             <a:noFill/>
@@ -5891,14 +7995,67 @@
       </p:sp>
       <p:sp>
         <p:nvSpPr>
-          <p:cNvPr id="3" name="TextBox 2"/>
+          <p:cNvPr id="3" name="Rounded Rectangle 2"/>
+          <p:cNvSpPr/>
+          <p:nvPr/>
+        </p:nvSpPr>
+        <p:spPr>
+          <a:xfrm>
+            <a:off x="548640" y="274320"/>
+            <a:ext cx="2194560" cy="457200"/>
+          </a:xfrm>
+          <a:prstGeom prst="roundRect">
+            <a:avLst/>
+          </a:prstGeom>
+          <a:solidFill>
+            <a:srgbClr val="D97706"/>
+          </a:solidFill>
+          <a:ln>
+            <a:noFill/>
+          </a:ln>
+        </p:spPr>
+        <p:style>
+          <a:lnRef idx="1">
+            <a:schemeClr val="accent1"/>
+          </a:lnRef>
+          <a:fillRef idx="3">
+            <a:schemeClr val="accent1"/>
+          </a:fillRef>
+          <a:effectRef idx="2">
+            <a:schemeClr val="accent1"/>
+          </a:effectRef>
+          <a:fontRef idx="minor">
+            <a:schemeClr val="lt1"/>
+          </a:fontRef>
+        </p:style>
+        <p:txBody>
+          <a:bodyPr rtlCol="0" anchor="ctr"/>
+          <a:lstStyle/>
+          <a:p>
+            <a:pPr algn="ctr">
+              <a:defRPr sz="1300" b="1">
+                <a:solidFill>
+                  <a:srgbClr val="FFFFFF"/>
+                </a:solidFill>
+                <a:latin typeface="Consolas"/>
+              </a:defRPr>
+            </a:pPr>
+            <a:r>
+              <a:t>HANDS-ON EXERCISE</a:t>
+            </a:r>
+          </a:p>
+        </p:txBody>
+      </p:sp>
+      <p:sp>
+        <p:nvSpPr>
+          <p:cNvPr id="4" name="TextBox 3"/>
           <p:cNvSpPr txBox="1"/>
           <p:nvPr/>
         </p:nvSpPr>
         <p:spPr>
           <a:xfrm>
-            <a:off x="731520" y="365760"/>
-            <a:ext cx="10515600" cy="822960"/>
+            <a:off x="3017520" y="274320"/>
+            <a:ext cx="8229600" cy="548640"/>
           </a:xfrm>
           <a:prstGeom prst="rect">
             <a:avLst/>
@@ -5911,30 +8068,116 @@
           </a:bodyPr>
           <a:lstStyle/>
           <a:p>
-            <a:pPr>
-              <a:defRPr sz="3200" b="1">
-                <a:solidFill>
-                  <a:srgbClr val="222222"/>
-                </a:solidFill>
-                <a:latin typeface="Calibri"/>
-              </a:defRPr>
-            </a:pPr>
-            <a:r>
-              <a:t>Capstone Workflow with doe-helper</a:t>
-            </a:r>
-          </a:p>
-        </p:txBody>
-      </p:sp>
-      <p:sp>
-        <p:nvSpPr>
-          <p:cNvPr id="4" name="TextBox 3"/>
+            <a:pPr algn="l">
+              <a:defRPr sz="2600" b="1">
+                <a:solidFill>
+                  <a:srgbClr val="111111"/>
+                </a:solidFill>
+                <a:latin typeface="Inter"/>
+              </a:defRPr>
+            </a:pPr>
+            <a:r>
+              <a:t>Capstone Project</a:t>
+            </a:r>
+          </a:p>
+        </p:txBody>
+      </p:sp>
+      <p:sp>
+        <p:nvSpPr>
+          <p:cNvPr id="5" name="Rounded Rectangle 4"/>
+          <p:cNvSpPr/>
+          <p:nvPr/>
+        </p:nvSpPr>
+        <p:spPr>
+          <a:xfrm>
+            <a:off x="548640" y="1005840"/>
+            <a:ext cx="10972800" cy="5120640"/>
+          </a:xfrm>
+          <a:prstGeom prst="roundRect">
+            <a:avLst/>
+          </a:prstGeom>
+          <a:solidFill>
+            <a:srgbClr val="FFFBEB"/>
+          </a:solidFill>
+          <a:ln>
+            <a:noFill/>
+          </a:ln>
+        </p:spPr>
+        <p:style>
+          <a:lnRef idx="1">
+            <a:schemeClr val="accent1"/>
+          </a:lnRef>
+          <a:fillRef idx="3">
+            <a:schemeClr val="accent1"/>
+          </a:fillRef>
+          <a:effectRef idx="2">
+            <a:schemeClr val="accent1"/>
+          </a:effectRef>
+          <a:fontRef idx="minor">
+            <a:schemeClr val="lt1"/>
+          </a:fontRef>
+        </p:style>
+        <p:txBody>
+          <a:bodyPr rtlCol="0" anchor="ctr"/>
+          <a:lstStyle/>
+          <a:p>
+            <a:pPr algn="ctr"/>
+          </a:p>
+        </p:txBody>
+      </p:sp>
+      <p:sp>
+        <p:nvSpPr>
+          <p:cNvPr id="6" name="Rectangle 5"/>
+          <p:cNvSpPr/>
+          <p:nvPr/>
+        </p:nvSpPr>
+        <p:spPr>
+          <a:xfrm>
+            <a:off x="548640" y="1005840"/>
+            <a:ext cx="36576" cy="5120640"/>
+          </a:xfrm>
+          <a:prstGeom prst="rect">
+            <a:avLst/>
+          </a:prstGeom>
+          <a:solidFill>
+            <a:srgbClr val="D97706"/>
+          </a:solidFill>
+          <a:ln>
+            <a:noFill/>
+          </a:ln>
+        </p:spPr>
+        <p:style>
+          <a:lnRef idx="1">
+            <a:schemeClr val="accent1"/>
+          </a:lnRef>
+          <a:fillRef idx="3">
+            <a:schemeClr val="accent1"/>
+          </a:fillRef>
+          <a:effectRef idx="2">
+            <a:schemeClr val="accent1"/>
+          </a:effectRef>
+          <a:fontRef idx="minor">
+            <a:schemeClr val="lt1"/>
+          </a:fontRef>
+        </p:style>
+        <p:txBody>
+          <a:bodyPr rtlCol="0" anchor="ctr"/>
+          <a:lstStyle/>
+          <a:p>
+            <a:pPr algn="ctr"/>
+          </a:p>
+        </p:txBody>
+      </p:sp>
+      <p:sp>
+        <p:nvSpPr>
+          <p:cNvPr id="7" name="TextBox 6"/>
           <p:cNvSpPr txBox="1"/>
           <p:nvPr/>
         </p:nvSpPr>
         <p:spPr>
           <a:xfrm>
-            <a:off x="914400" y="1463040"/>
-            <a:ext cx="10058400" cy="4754880"/>
+            <a:off x="822960" y="1143000"/>
+            <a:ext cx="10424160" cy="4846320"/>
           </a:xfrm>
           <a:prstGeom prst="rect">
             <a:avLst/>
@@ -5949,129 +8192,194 @@
           <a:p>
             <a:pPr>
               <a:spcAft>
-                <a:spcPts val="800"/>
-              </a:spcAft>
-              <a:defRPr sz="2200" b="0">
-                <a:solidFill>
-                  <a:srgbClr val="222222"/>
-                </a:solidFill>
-                <a:latin typeface="Calibri"/>
-              </a:defRPr>
-            </a:pPr>
-            <a:r>
-              <a:t>Step 1: doe init project/ --design plackett_burman</a:t>
+                <a:spcPts val="500"/>
+              </a:spcAft>
+              <a:defRPr sz="1700">
+                <a:solidFill>
+                  <a:srgbClr val="333333"/>
+                </a:solidFill>
+                <a:latin typeface="Inter"/>
+              </a:defRPr>
+            </a:pPr>
+            <a:r>
+              <a:t>1. Choose Option A, B, C, or propose your own</a:t>
             </a:r>
           </a:p>
           <a:p>
             <a:pPr>
               <a:spcAft>
-                <a:spcPts val="800"/>
-              </a:spcAft>
-              <a:defRPr sz="2200" b="0">
-                <a:solidFill>
-                  <a:srgbClr val="222222"/>
-                </a:solidFill>
-                <a:latin typeface="Calibri"/>
-              </a:defRPr>
-            </a:pPr>
-            <a:r>
-              <a:t>Step 2: doe generate project/ &amp;&amp; bash project/run.sh</a:t>
+                <a:spcPts val="500"/>
+              </a:spcAft>
+              <a:defRPr sz="1700">
+                <a:solidFill>
+                  <a:srgbClr val="333333"/>
+                </a:solidFill>
+                <a:latin typeface="Inter"/>
+              </a:defRPr>
+            </a:pPr>
+            <a:r>
+              <a:t>2. Complete the full workflow using doe-helper</a:t>
             </a:r>
           </a:p>
           <a:p>
             <a:pPr>
               <a:spcAft>
-                <a:spcPts val="800"/>
-              </a:spcAft>
-              <a:defRPr sz="2200" b="0">
-                <a:solidFill>
-                  <a:srgbClr val="222222"/>
-                </a:solidFill>
-                <a:latin typeface="Calibri"/>
-              </a:defRPr>
-            </a:pPr>
-            <a:r>
-              <a:t>Step 3: doe analyze project/ -- identify significant factors</a:t>
+                <a:spcPts val="500"/>
+              </a:spcAft>
+              <a:defRPr sz="1700">
+                <a:solidFill>
+                  <a:srgbClr val="333333"/>
+                </a:solidFill>
+                <a:latin typeface="Inter"/>
+              </a:defRPr>
+            </a:pPr>
+            <a:r>
+              <a:t>3. Produce all deliverables from the previous slide</a:t>
             </a:r>
           </a:p>
           <a:p>
             <a:pPr>
               <a:spcAft>
-                <a:spcPts val="800"/>
-              </a:spcAft>
-              <a:defRPr sz="2200" b="0">
-                <a:solidFill>
-                  <a:srgbClr val="222222"/>
-                </a:solidFill>
-                <a:latin typeface="Calibri"/>
-              </a:defRPr>
-            </a:pPr>
-            <a:r>
-              <a:t>Step 4: Create new config with reduced factors, type=ccd</a:t>
+                <a:spcPts val="500"/>
+              </a:spcAft>
+              <a:defRPr sz="1700">
+                <a:solidFill>
+                  <a:srgbClr val="333333"/>
+                </a:solidFill>
+                <a:latin typeface="Inter"/>
+              </a:defRPr>
+            </a:pPr>
+            <a:r>
+              <a:t>4. Prepare a 5-minute presentation:</a:t>
+            </a:r>
+          </a:p>
+          <a:p>
+            <a:pPr lvl="1">
+              <a:spcAft>
+                <a:spcPts val="500"/>
+              </a:spcAft>
+              <a:defRPr sz="1500">
+                <a:solidFill>
+                  <a:srgbClr val="666666"/>
+                </a:solidFill>
+                <a:latin typeface="Inter"/>
+              </a:defRPr>
+            </a:pPr>
+            <a:r>
+              <a:t>What you learned about the system</a:t>
+            </a:r>
+          </a:p>
+          <a:p>
+            <a:pPr lvl="1">
+              <a:spcAft>
+                <a:spcPts val="500"/>
+              </a:spcAft>
+              <a:defRPr sz="1500">
+                <a:solidFill>
+                  <a:srgbClr val="666666"/>
+                </a:solidFill>
+                <a:latin typeface="Inter"/>
+              </a:defRPr>
+            </a:pPr>
+            <a:r>
+              <a:t>Key factors and their effects</a:t>
+            </a:r>
+          </a:p>
+          <a:p>
+            <a:pPr lvl="1">
+              <a:spcAft>
+                <a:spcPts val="500"/>
+              </a:spcAft>
+              <a:defRPr sz="1500">
+                <a:solidFill>
+                  <a:srgbClr val="666666"/>
+                </a:solidFill>
+                <a:latin typeface="Inter"/>
+              </a:defRPr>
+            </a:pPr>
+            <a:r>
+              <a:t>Optimal settings and predicted performance</a:t>
+            </a:r>
+          </a:p>
+          <a:p>
+            <a:pPr lvl="1">
+              <a:spcAft>
+                <a:spcPts val="500"/>
+              </a:spcAft>
+              <a:defRPr sz="1500">
+                <a:solidFill>
+                  <a:srgbClr val="666666"/>
+                </a:solidFill>
+                <a:latin typeface="Inter"/>
+              </a:defRPr>
+            </a:pPr>
+            <a:r>
+              <a:t>What you would do next with more runs</a:t>
             </a:r>
           </a:p>
           <a:p>
             <a:pPr>
               <a:spcAft>
-                <a:spcPts val="800"/>
-              </a:spcAft>
-              <a:defRPr sz="2200" b="0">
-                <a:solidFill>
-                  <a:srgbClr val="222222"/>
-                </a:solidFill>
-                <a:latin typeface="Calibri"/>
-              </a:defRPr>
-            </a:pPr>
-            <a:r>
-              <a:t>Step 5: doe generate project_rsm/ &amp;&amp; bash project_rsm/run.sh</a:t>
-            </a:r>
+                <a:spcPts val="500"/>
+              </a:spcAft>
+              <a:defRPr sz="1700">
+                <a:solidFill>
+                  <a:srgbClr val="333333"/>
+                </a:solidFill>
+                <a:latin typeface="Inter"/>
+              </a:defRPr>
+            </a:pPr>
           </a:p>
           <a:p>
             <a:pPr>
               <a:spcAft>
-                <a:spcPts val="800"/>
-              </a:spcAft>
-              <a:defRPr sz="2200" b="0">
-                <a:solidFill>
-                  <a:srgbClr val="222222"/>
-                </a:solidFill>
-                <a:latin typeface="Calibri"/>
-              </a:defRPr>
-            </a:pPr>
-            <a:r>
-              <a:t>Step 6: doe analyze project_rsm/ -- response surface analysis</a:t>
-            </a:r>
-          </a:p>
-          <a:p>
-            <a:pPr>
-              <a:spcAft>
-                <a:spcPts val="800"/>
-              </a:spcAft>
-              <a:defRPr sz="2200" b="0">
-                <a:solidFill>
-                  <a:srgbClr val="222222"/>
-                </a:solidFill>
-                <a:latin typeface="Calibri"/>
-              </a:defRPr>
-            </a:pPr>
-            <a:r>
-              <a:t>Step 7: doe optimize project_rsm/ -- find optimal settings</a:t>
-            </a:r>
-          </a:p>
-          <a:p>
-            <a:pPr>
-              <a:spcAft>
-                <a:spcPts val="800"/>
-              </a:spcAft>
-              <a:defRPr sz="2200" b="0">
-                <a:solidFill>
-                  <a:srgbClr val="222222"/>
-                </a:solidFill>
-                <a:latin typeface="Calibri"/>
-              </a:defRPr>
-            </a:pPr>
-            <a:r>
-              <a:t>Step 8: doe report project_rsm/ -- generate final report</a:t>
+                <a:spcPts val="500"/>
+              </a:spcAft>
+              <a:defRPr sz="1700">
+                <a:solidFill>
+                  <a:srgbClr val="333333"/>
+                </a:solidFill>
+                <a:latin typeface="Inter"/>
+              </a:defRPr>
+            </a:pPr>
+            <a:r>
+              <a:t>Time: 70 min project + 20 min presentations</a:t>
+            </a:r>
+          </a:p>
+        </p:txBody>
+      </p:sp>
+      <p:sp>
+        <p:nvSpPr>
+          <p:cNvPr id="8" name="TextBox 7"/>
+          <p:cNvSpPr txBox="1"/>
+          <p:nvPr/>
+        </p:nvSpPr>
+        <p:spPr>
+          <a:xfrm>
+            <a:off x="731520" y="6400800"/>
+            <a:ext cx="10058400" cy="365760"/>
+          </a:xfrm>
+          <a:prstGeom prst="rect">
+            <a:avLst/>
+          </a:prstGeom>
+          <a:noFill/>
+        </p:spPr>
+        <p:txBody>
+          <a:bodyPr wrap="square">
+            <a:spAutoFit/>
+          </a:bodyPr>
+          <a:lstStyle/>
+          <a:p>
+            <a:pPr algn="l">
+              <a:defRPr sz="1000" b="0">
+                <a:solidFill>
+                  <a:srgbClr val="999999"/>
+                </a:solidFill>
+                <a:latin typeface="Consolas"/>
+              </a:defRPr>
+            </a:pPr>
+            <a:r>
+              <a:t>© 2026 Martin J. Gallagher  |  GPL-3.0-or-later  |  doehelper.com</a:t>
             </a:r>
           </a:p>
         </p:txBody>
@@ -6090,7 +8398,7 @@
     <p:bg>
       <p:bgPr>
         <a:solidFill>
-          <a:srgbClr val="FFFFFF"/>
+          <a:srgbClr val="312E81"/>
         </a:solidFill>
         <a:effectLst/>
       </p:bgPr>
@@ -6104,20 +8412,23 @@
       <p:grpSpPr/>
       <p:sp>
         <p:nvSpPr>
-          <p:cNvPr id="2" name="Rectangle 1"/>
+          <p:cNvPr id="2" name="Oval 1"/>
           <p:cNvSpPr/>
           <p:nvPr/>
         </p:nvSpPr>
         <p:spPr>
           <a:xfrm>
-            <a:off x="0" y="0"/>
-            <a:ext cx="12191695" cy="54864"/>
-          </a:xfrm>
-          <a:prstGeom prst="rect">
+            <a:off x="7315200" y="-1828800"/>
+            <a:ext cx="5486400" cy="5486400"/>
+          </a:xfrm>
+          <a:prstGeom prst="ellipse">
             <a:avLst/>
           </a:prstGeom>
           <a:solidFill>
-            <a:srgbClr val="FF8C00"/>
+            <a:srgbClr val="4338CA">
+              <a:lumMod val="80000"/>
+              <a:lumOff val="20000"/>
+            </a:srgbClr>
           </a:solidFill>
           <a:ln>
             <a:noFill/>
@@ -6147,103 +8458,14 @@
       </p:sp>
       <p:sp>
         <p:nvSpPr>
-          <p:cNvPr id="3" name="Rounded Rectangle 2"/>
-          <p:cNvSpPr/>
-          <p:nvPr/>
-        </p:nvSpPr>
-        <p:spPr>
-          <a:xfrm>
-            <a:off x="731520" y="320040"/>
-            <a:ext cx="2011680" cy="502920"/>
-          </a:xfrm>
-          <a:prstGeom prst="roundRect">
-            <a:avLst/>
-          </a:prstGeom>
-          <a:solidFill>
-            <a:srgbClr val="FF8C00"/>
-          </a:solidFill>
-          <a:ln>
-            <a:noFill/>
-          </a:ln>
-        </p:spPr>
-        <p:style>
-          <a:lnRef idx="1">
-            <a:schemeClr val="accent1"/>
-          </a:lnRef>
-          <a:fillRef idx="3">
-            <a:schemeClr val="accent1"/>
-          </a:fillRef>
-          <a:effectRef idx="2">
-            <a:schemeClr val="accent1"/>
-          </a:effectRef>
-          <a:fontRef idx="minor">
-            <a:schemeClr val="lt1"/>
-          </a:fontRef>
-        </p:style>
-        <p:txBody>
-          <a:bodyPr rtlCol="0" anchor="ctr"/>
-          <a:lstStyle/>
-          <a:p>
-            <a:pPr algn="ctr">
-              <a:defRPr sz="1400" b="1">
-                <a:solidFill>
-                  <a:srgbClr val="FFFFFF"/>
-                </a:solidFill>
-                <a:latin typeface="Calibri"/>
-              </a:defRPr>
-            </a:pPr>
-            <a:r>
-              <a:t>HANDS-ON EXERCISE</a:t>
-            </a:r>
-          </a:p>
-        </p:txBody>
-      </p:sp>
-      <p:sp>
-        <p:nvSpPr>
-          <p:cNvPr id="4" name="TextBox 3"/>
+          <p:cNvPr id="3" name="TextBox 2"/>
           <p:cNvSpPr txBox="1"/>
           <p:nvPr/>
         </p:nvSpPr>
         <p:spPr>
           <a:xfrm>
-            <a:off x="3017520" y="320040"/>
-            <a:ext cx="8229600" cy="731520"/>
-          </a:xfrm>
-          <a:prstGeom prst="rect">
-            <a:avLst/>
-          </a:prstGeom>
-          <a:noFill/>
-        </p:spPr>
-        <p:txBody>
-          <a:bodyPr wrap="none">
-            <a:spAutoFit/>
-          </a:bodyPr>
-          <a:lstStyle/>
-          <a:p>
-            <a:pPr>
-              <a:defRPr sz="3000" b="1">
-                <a:solidFill>
-                  <a:srgbClr val="222222"/>
-                </a:solidFill>
-                <a:latin typeface="Calibri"/>
-              </a:defRPr>
-            </a:pPr>
-            <a:r>
-              <a:t>Capstone Project</a:t>
-            </a:r>
-          </a:p>
-        </p:txBody>
-      </p:sp>
-      <p:sp>
-        <p:nvSpPr>
-          <p:cNvPr id="5" name="TextBox 4"/>
-          <p:cNvSpPr txBox="1"/>
-          <p:nvPr/>
-        </p:nvSpPr>
-        <p:spPr>
-          <a:xfrm>
-            <a:off x="914400" y="1371600"/>
-            <a:ext cx="10058400" cy="5029200"/>
+            <a:off x="914400" y="2286000"/>
+            <a:ext cx="10058400" cy="1828800"/>
           </a:xfrm>
           <a:prstGeom prst="rect">
             <a:avLst/>
@@ -6256,160 +8478,52 @@
           </a:bodyPr>
           <a:lstStyle/>
           <a:p>
-            <a:pPr>
-              <a:spcAft>
-                <a:spcPts val="600"/>
-              </a:spcAft>
-              <a:defRPr sz="2000">
-                <a:solidFill>
-                  <a:srgbClr val="222222"/>
-                </a:solidFill>
-                <a:latin typeface="Calibri"/>
-              </a:defRPr>
-            </a:pPr>
-            <a:r>
-              <a:t>1. Choose Option A, B, C, or propose your own scenario</a:t>
-            </a:r>
-          </a:p>
-          <a:p>
-            <a:pPr>
-              <a:spcAft>
-                <a:spcPts val="600"/>
-              </a:spcAft>
-              <a:defRPr sz="2000">
-                <a:solidFill>
-                  <a:srgbClr val="222222"/>
-                </a:solidFill>
-                <a:latin typeface="Calibri"/>
-              </a:defRPr>
-            </a:pPr>
-            <a:r>
-              <a:t>2. Complete the full workflow using doe-helper commands</a:t>
-            </a:r>
-          </a:p>
-          <a:p>
-            <a:pPr>
-              <a:spcAft>
-                <a:spcPts val="600"/>
-              </a:spcAft>
-              <a:defRPr sz="2000">
-                <a:solidFill>
-                  <a:srgbClr val="222222"/>
-                </a:solidFill>
-                <a:latin typeface="Calibri"/>
-              </a:defRPr>
-            </a:pPr>
-            <a:r>
-              <a:t>3. Produce all deliverables listed on the previous slide</a:t>
-            </a:r>
-          </a:p>
-          <a:p>
-            <a:pPr>
-              <a:spcAft>
-                <a:spcPts val="600"/>
-              </a:spcAft>
-              <a:defRPr sz="2000">
-                <a:solidFill>
-                  <a:srgbClr val="222222"/>
-                </a:solidFill>
-                <a:latin typeface="Calibri"/>
-              </a:defRPr>
-            </a:pPr>
-            <a:r>
-              <a:t>4. Prepare a 5-minute presentation covering:</a:t>
-            </a:r>
-          </a:p>
-          <a:p>
-            <a:pPr lvl="1">
-              <a:spcAft>
-                <a:spcPts val="600"/>
-              </a:spcAft>
-              <a:defRPr sz="1800">
-                <a:solidFill>
-                  <a:srgbClr val="222222"/>
-                </a:solidFill>
-                <a:latin typeface="Calibri"/>
-              </a:defRPr>
-            </a:pPr>
-            <a:r>
-              <a:t>What you learned about the system</a:t>
-            </a:r>
-          </a:p>
-          <a:p>
-            <a:pPr lvl="1">
-              <a:spcAft>
-                <a:spcPts val="600"/>
-              </a:spcAft>
-              <a:defRPr sz="1800">
-                <a:solidFill>
-                  <a:srgbClr val="222222"/>
-                </a:solidFill>
-                <a:latin typeface="Calibri"/>
-              </a:defRPr>
-            </a:pPr>
-            <a:r>
-              <a:t>Key factors and their effects</a:t>
-            </a:r>
-          </a:p>
-          <a:p>
-            <a:pPr lvl="1">
-              <a:spcAft>
-                <a:spcPts val="600"/>
-              </a:spcAft>
-              <a:defRPr sz="1800">
-                <a:solidFill>
-                  <a:srgbClr val="222222"/>
-                </a:solidFill>
-                <a:latin typeface="Calibri"/>
-              </a:defRPr>
-            </a:pPr>
-            <a:r>
-              <a:t>Optimal settings and predicted performance</a:t>
-            </a:r>
-          </a:p>
-          <a:p>
-            <a:pPr lvl="1">
-              <a:spcAft>
-                <a:spcPts val="600"/>
-              </a:spcAft>
-              <a:defRPr sz="1800">
-                <a:solidFill>
-                  <a:srgbClr val="222222"/>
-                </a:solidFill>
-                <a:latin typeface="Calibri"/>
-              </a:defRPr>
-            </a:pPr>
-            <a:r>
-              <a:t>What you would do next with more runs</a:t>
-            </a:r>
-          </a:p>
-          <a:p>
-            <a:pPr>
-              <a:spcAft>
-                <a:spcPts val="600"/>
-              </a:spcAft>
-              <a:defRPr sz="2000">
-                <a:solidFill>
-                  <a:srgbClr val="222222"/>
-                </a:solidFill>
-                <a:latin typeface="Calibri"/>
-              </a:defRPr>
-            </a:pPr>
-          </a:p>
-          <a:p>
-            <a:pPr>
-              <a:spcAft>
-                <a:spcPts val="600"/>
-              </a:spcAft>
-              <a:defRPr sz="2000">
-                <a:solidFill>
-                  <a:srgbClr val="222222"/>
-                </a:solidFill>
-                <a:latin typeface="Calibri"/>
-              </a:defRPr>
-            </a:pPr>
-            <a:r>
-              <a:t>Time allocation: 90 minutes for the project, 30 minutes for presentations</a:t>
+            <a:pPr algn="ctr">
+              <a:defRPr sz="4200" b="1">
+                <a:solidFill>
+                  <a:srgbClr val="FFFFFF"/>
+                </a:solidFill>
+                <a:latin typeface="Inter"/>
+              </a:defRPr>
+            </a:pPr>
+            <a:r>
+              <a:t>Course Summary</a:t>
+            </a:r>
+          </a:p>
+        </p:txBody>
+      </p:sp>
+      <p:sp>
+        <p:nvSpPr>
+          <p:cNvPr id="4" name="TextBox 3"/>
+          <p:cNvSpPr txBox="1"/>
+          <p:nvPr/>
+        </p:nvSpPr>
+        <p:spPr>
+          <a:xfrm>
+            <a:off x="1828800" y="4206240"/>
+            <a:ext cx="8229600" cy="914400"/>
+          </a:xfrm>
+          <a:prstGeom prst="rect">
+            <a:avLst/>
+          </a:prstGeom>
+          <a:noFill/>
+        </p:spPr>
+        <p:txBody>
+          <a:bodyPr wrap="square">
+            <a:spAutoFit/>
+          </a:bodyPr>
+          <a:lstStyle/>
+          <a:p>
+            <a:pPr algn="ctr">
+              <a:defRPr sz="2000" b="0">
+                <a:solidFill>
+                  <a:srgbClr val="C7D2FE"/>
+                </a:solidFill>
+                <a:latin typeface="Inter"/>
+              </a:defRPr>
+            </a:pPr>
+            <a:r>
+              <a:t>Congratulations on completing the DOE Helper Training Course!</a:t>
             </a:r>
           </a:p>
         </p:txBody>
